--- a/docs/presentation/bench_v2_weekly_revised/20260731_GSoC_revised.pptx
+++ b/docs/presentation/bench_v2_weekly_revised/20260731_GSoC_revised.pptx
@@ -519,7 +519,7 @@
           <a:p>
             <a:r>
               <a:rPr lang="en-US" dirty="0"/>
-              <a:t>Short framing: this is an interim update. The classical half of the benchmark is finished, the LLM half has not run yet because it needs API spending approval. VQC = variational quantum circuit; QAS = quantum architecture search. Everything shown is generated from durable stores at commit da6ef34.</a:t>
+              <a:t>Short framing: this is an interim update. The classical half of the benchmark is finished, the LLM half has not run yet because it needs API spending approval. VQC = variational quantum circuit; QAS = quantum architecture search. Everything shown is generated from durable stores at commit 589b7e3.</a:t>
             </a:r>
             <a:endParaRPr lang="en-US" dirty="0"/>
           </a:p>
@@ -607,7 +607,7 @@
           <a:p>
             <a:r>
               <a:rPr lang="en-US" dirty="0"/>
-              <a:t>Lead with the honest answer: the headline question is not answered yet. What I can defend is the classical baseline and the machinery around it. The ask is approval of a hard cap, because the cap is what the code actually enforces. 1,480 expected calls at the conservative five-cent reservation is $74; the per-cell 40-call guard bounds the absolute worst case at $440, so a $120 cap covers the expected run with headroom and still stops a runaway. The model is not pinned yet, so I show per-model estimates in the appendix rather than quoting one number. If the cap binds mid-run, cells resume from their stores — no work is lost.</a:t>
+              <a:t>Lead with the honest answer: the headline question is not answered yet. What I can defend is the classical baseline and the machinery around it. The spending question is now settled in code rather than by a promise. A durable SQLite ledger reserves the estimated cost before each request and settles it from the returned token counts, so the cap is one cumulative total shared by every cell, every retry and every process restart. The model is pinned and priced from a dated manifest. The cumulative cap is $2.00 and the measured spend is exactly zero, because the API account returned insufficient_quota on the very first preflight request and the ledger released all three reservations. So the block is billing, not authorisation. If the cap ever binds mid-run the run stops cleanly and cells resume from their stores — no work is lost and the cap is never auto-raised.</a:t>
             </a:r>
             <a:endParaRPr lang="en-US" dirty="0"/>
           </a:p>
@@ -1751,7 +1751,7 @@
           <a:p>
             <a:r>
               <a:rPr lang="en-US" dirty="0"/>
-              <a:t>E0 replays the February pilot offline and reproduces it exactly with zero API calls. E1 is the joint track, E2 the main n=5 architecture search, E3 the qubit-scaling study. All 460 classical cells finished with no failures. The 220 LLM cells are blocked by spending policy, and E4 and E5 depend on them, so they are pending too. The completion checker still reports 9 of 17 criteria — it fails correctly and I did not weaken it.</a:t>
+              <a:t>E0 replays the February pilot offline and reproduces it exactly with zero API calls. E1 is the joint track, E2 the main n=5 architecture search, E3 the qubit-scaling study. All 460 classical cells finished with no failures. The 220 LLM cells are blocked by spending policy, and E4 and E5 depend on them, so they are pending too. The completion checker reports 10 of 17 criteria — it fails correctly and I did not weaken it.</a:t>
             </a:r>
             <a:endParaRPr lang="en-US" dirty="0"/>
           </a:p>
@@ -2542,7 +2542,7 @@
                 <a:ea typeface="Arial" pitchFamily="34" charset="-122"/>
                 <a:cs typeface="Arial" pitchFamily="34" charset="-120"/>
               </a:rPr>
-              <a:t>classical baselines complete; real-LLM evaluation pending budget approval</a:t>
+              <a:t>classical baselines complete; the real-LLM matrix is blocked on API quota, not on budget approval</a:t>
             </a:r>
             <a:endParaRPr lang="en-US" sz="2000" dirty="0"/>
           </a:p>
@@ -2615,7 +2615,7 @@
                 <a:ea typeface="Arial" pitchFamily="34" charset="-122"/>
                 <a:cs typeface="Arial" pitchFamily="34" charset="-120"/>
               </a:rPr>
-              <a:t>July 31, 2026  ·  base commit da6ef34  ·  presentation/rebuild-gsoc-benchmark-v2</a:t>
+              <a:t>July 31, 2026  ·  base commit 589b7e3  ·  experiment/bench-v2-real-llm-cost-minimal</a:t>
             </a:r>
             <a:endParaRPr lang="en-US" sz="2000" dirty="0"/>
           </a:p>
@@ -2686,7 +2686,7 @@
                 <a:ea typeface="Arial" pitchFamily="34" charset="-122"/>
                 <a:cs typeface="Arial" pitchFamily="34" charset="-120"/>
               </a:rPr>
-              <a:t>Interim answer, and the decision I need</a:t>
+              <a:t>Interim answer, and what is blocking the rest</a:t>
             </a:r>
             <a:endParaRPr lang="en-US" sz="3000" dirty="0"/>
           </a:p>
@@ -2810,7 +2810,7 @@
         <p:spPr>
           <a:xfrm>
             <a:off x="868680" y="2852928"/>
-            <a:ext cx="4937760" cy="502920"/>
+            <a:ext cx="5029200" cy="384048"/>
           </a:xfrm>
           <a:prstGeom prst="rect">
             <a:avLst/>
@@ -2826,7 +2826,7 @@
               <a:buNone/>
             </a:pPr>
             <a:r>
-              <a:rPr lang="en-US" sz="1900" b="1" dirty="0">
+              <a:rPr lang="en-US" sz="1800" b="1" dirty="0">
                 <a:solidFill>
                   <a:srgbClr val="FFFFFF"/>
                 </a:solidFill>
@@ -2834,9 +2834,9 @@
                 <a:ea typeface="Arial" pitchFamily="34" charset="-122"/>
                 <a:cs typeface="Arial" pitchFamily="34" charset="-120"/>
               </a:rPr>
-              <a:t>Decision requested — approve a hard global API cap</a:t>
-            </a:r>
-            <a:endParaRPr lang="en-US" sz="1900" dirty="0"/>
+              <a:t>Spending control: implemented, not promised</a:t>
+            </a:r>
+            <a:endParaRPr lang="en-US" sz="1800" dirty="0"/>
           </a:p>
         </p:txBody>
       </p:sp>
@@ -2848,8 +2848,8 @@
         </p:nvSpPr>
         <p:spPr>
           <a:xfrm>
-            <a:off x="960120" y="3401568"/>
-            <a:ext cx="4800600" cy="2011680"/>
+            <a:off x="960120" y="3310128"/>
+            <a:ext cx="4800600" cy="2103120"/>
           </a:xfrm>
           <a:prstGeom prst="rect">
             <a:avLst/>
@@ -2863,13 +2863,13 @@
           <a:p>
             <a:pPr marL="342900" indent="-342900">
               <a:spcAft>
-                <a:spcPts val="800"/>
+                <a:spcPts val="700"/>
               </a:spcAft>
               <a:buSzPct val="100000"/>
               <a:buChar char="•"/>
             </a:pPr>
             <a:r>
-              <a:rPr lang="en-US" sz="1600" dirty="0">
+              <a:rPr lang="en-US" sz="1400" dirty="0">
                 <a:solidFill>
                   <a:srgbClr val="E8EEF7"/>
                 </a:solidFill>
@@ -2877,20 +2877,20 @@
                 <a:ea typeface="Arial" pitchFamily="34" charset="-122"/>
                 <a:cs typeface="Arial" pitchFamily="34" charset="-120"/>
               </a:rPr>
-              <a:t>220 cells, ≈1,480 calls at 3 candidates per call</a:t>
-            </a:r>
-            <a:endParaRPr lang="en-US" sz="1600" dirty="0"/>
+              <a:t>Durable SQLite ledger shared by every cell, retry and restart — cumulative, not per cell</a:t>
+            </a:r>
+            <a:endParaRPr lang="en-US" sz="1400" dirty="0"/>
           </a:p>
           <a:p>
             <a:pPr marL="342900" indent="-342900">
               <a:spcAft>
-                <a:spcPts val="800"/>
+                <a:spcPts val="700"/>
               </a:spcAft>
               <a:buSzPct val="100000"/>
               <a:buChar char="•"/>
             </a:pPr>
             <a:r>
-              <a:rPr lang="en-US" sz="1600" dirty="0">
+              <a:rPr lang="en-US" sz="1400" dirty="0">
                 <a:solidFill>
                   <a:srgbClr val="E8EEF7"/>
                 </a:solidFill>
@@ -2898,20 +2898,20 @@
                 <a:ea typeface="Arial" pitchFamily="34" charset="-122"/>
                 <a:cs typeface="Arial" pitchFamily="34" charset="-120"/>
               </a:rPr>
-              <a:t>Reserved at $0.05/call ⇒ $74; the 40-call/cell guard bounds the worst case at $440</a:t>
-            </a:r>
-            <a:endParaRPr lang="en-US" sz="1600" dirty="0"/>
+              <a:t>Cost settled from returned token counts against a dated price manifest</a:t>
+            </a:r>
+            <a:endParaRPr lang="en-US" sz="1400" dirty="0"/>
           </a:p>
           <a:p>
             <a:pPr marL="342900" indent="-342900">
               <a:spcAft>
-                <a:spcPts val="800"/>
+                <a:spcPts val="700"/>
               </a:spcAft>
               <a:buSzPct val="100000"/>
               <a:buChar char="•"/>
             </a:pPr>
             <a:r>
-              <a:rPr lang="en-US" sz="1600" dirty="0">
+              <a:rPr lang="en-US" sz="1400" dirty="0">
                 <a:solidFill>
                   <a:srgbClr val="E8EEF7"/>
                 </a:solidFill>
@@ -2919,20 +2919,20 @@
                 <a:ea typeface="Arial" pitchFamily="34" charset="-122"/>
                 <a:cs typeface="Arial" pitchFamily="34" charset="-120"/>
               </a:rPr>
-              <a:t>Model not yet pinned — per-model estimates in the appendix</a:t>
-            </a:r>
-            <a:endParaRPr lang="en-US" sz="1600" dirty="0"/>
+              <a:t>Model pinned to gpt-5-nano-2025-08-07; cumulative cap $2.00</a:t>
+            </a:r>
+            <a:endParaRPr lang="en-US" sz="1400" dirty="0"/>
           </a:p>
           <a:p>
             <a:pPr marL="342900" indent="-342900">
               <a:spcAft>
-                <a:spcPts val="800"/>
+                <a:spcPts val="700"/>
               </a:spcAft>
               <a:buSzPct val="100000"/>
               <a:buChar char="•"/>
             </a:pPr>
             <a:r>
-              <a:rPr lang="en-US" sz="1600" dirty="0">
+              <a:rPr lang="en-US" sz="1400" dirty="0">
                 <a:solidFill>
                   <a:srgbClr val="E8EEF7"/>
                 </a:solidFill>
@@ -2940,9 +2940,9 @@
                 <a:ea typeface="Arial" pitchFamily="34" charset="-122"/>
                 <a:cs typeface="Arial" pitchFamily="34" charset="-120"/>
               </a:rPr>
-              <a:t>Enforced in code: no positive LLM_API_BUDGET_USD, no calls</a:t>
-            </a:r>
-            <a:endParaRPr lang="en-US" sz="1600" dirty="0"/>
+              <a:t>Measured spend $0.00 — account returned insufficient_quota, reservations released</a:t>
+            </a:r>
+            <a:endParaRPr lang="en-US" sz="1400" dirty="0"/>
           </a:p>
         </p:txBody>
       </p:sp>
@@ -3051,7 +3051,7 @@
                 <a:ea typeface="Arial" pitchFamily="34" charset="-122"/>
                 <a:cs typeface="Arial" pitchFamily="34" charset="-120"/>
               </a:rPr>
-              <a:t>Run the 220 real-LLM cells (both tracks)</a:t>
+              <a:t>Restore API quota, then run the 220 real-LLM cells (both tracks)</a:t>
             </a:r>
             <a:endParaRPr lang="en-US" sz="1600" dirty="0"/>
           </a:p>
@@ -3128,8 +3128,8 @@
         </p:nvSpPr>
         <p:spPr>
           <a:xfrm>
-            <a:off x="640080" y="5806440"/>
-            <a:ext cx="10972800" cy="502920"/>
+            <a:off x="640080" y="5760720"/>
+            <a:ext cx="10972800" cy="548640"/>
           </a:xfrm>
           <a:prstGeom prst="rect">
             <a:avLst/>
@@ -3145,7 +3145,7 @@
               <a:buNone/>
             </a:pPr>
             <a:r>
-              <a:rPr lang="en-US" sz="2400" b="1" dirty="0">
+              <a:rPr lang="en-US" sz="2000" b="1" dirty="0">
                 <a:solidFill>
                   <a:srgbClr val="FFD9A0"/>
                 </a:solidFill>
@@ -3153,9 +3153,9 @@
                 <a:ea typeface="Arial" pitchFamily="34" charset="-122"/>
                 <a:cs typeface="Arial" pitchFamily="34" charset="-120"/>
               </a:rPr>
-              <a:t>Can I proceed with a hard global cap of $120?</a:t>
-            </a:r>
-            <a:endParaRPr lang="en-US" sz="2400" dirty="0"/>
+              <a:t>Blocked on API quota, not on approval: cap $2.00 cumulative, measured spend $0.00</a:t>
+            </a:r>
+            <a:endParaRPr lang="en-US" sz="2000" dirty="0"/>
           </a:p>
         </p:txBody>
       </p:sp>
@@ -4003,13 +4003,13 @@
           <a:p>
             <a:pPr marL="342900" indent="-342900">
               <a:spcAft>
-                <a:spcPts val="1200"/>
+                <a:spcPts val="1100"/>
               </a:spcAft>
               <a:buSzPct val="100000"/>
               <a:buChar char="•"/>
             </a:pPr>
             <a:r>
-              <a:rPr lang="en-US" sz="1700" dirty="0">
+              <a:rPr lang="en-US" sz="1600" dirty="0">
                 <a:solidFill>
                   <a:srgbClr val="1A1A2E"/>
                 </a:solidFill>
@@ -4019,18 +4019,18 @@
               </a:rPr>
               <a:t>Paired tests within each (task, n) family: exact Wilcoxon signed-rank plus a paired sign-flip permutation test on the mean difference (10,000 resamples, seed 20260729).</a:t>
             </a:r>
-            <a:endParaRPr lang="en-US" sz="1700" dirty="0"/>
+            <a:endParaRPr lang="en-US" sz="1600" dirty="0"/>
           </a:p>
           <a:p>
             <a:pPr marL="342900" indent="-342900">
               <a:spcAft>
-                <a:spcPts val="1200"/>
+                <a:spcPts val="1100"/>
               </a:spcAft>
               <a:buSzPct val="100000"/>
               <a:buChar char="•"/>
             </a:pPr>
             <a:r>
-              <a:rPr lang="en-US" sz="1700" dirty="0">
+              <a:rPr lang="en-US" sz="1600" dirty="0">
                 <a:solidFill>
                   <a:srgbClr val="1A1A2E"/>
                 </a:solidFill>
@@ -4040,18 +4040,18 @@
               </a:rPr>
               <a:t>Multiplicity: Holm step-down applied to the permutation p-values inside each family.</a:t>
             </a:r>
-            <a:endParaRPr lang="en-US" sz="1700" dirty="0"/>
+            <a:endParaRPr lang="en-US" sz="1600" dirty="0"/>
           </a:p>
           <a:p>
             <a:pPr marL="342900" indent="-342900">
               <a:spcAft>
-                <a:spcPts val="1200"/>
+                <a:spcPts val="1100"/>
               </a:spcAft>
               <a:buSzPct val="100000"/>
               <a:buChar char="•"/>
             </a:pPr>
             <a:r>
-              <a:rPr lang="en-US" sz="1700" dirty="0">
+              <a:rPr lang="en-US" sz="1600" dirty="0">
                 <a:solidFill>
                   <a:srgbClr val="1A1A2E"/>
                 </a:solidFill>
@@ -4061,18 +4061,18 @@
               </a:rPr>
               <a:t>Effect sizes: Hodges–Lehmann shift (median of Walsh averages, RMSE units) and paired Cliff's δ.</a:t>
             </a:r>
-            <a:endParaRPr lang="en-US" sz="1700" dirty="0"/>
+            <a:endParaRPr lang="en-US" sz="1600" dirty="0"/>
           </a:p>
           <a:p>
             <a:pPr marL="342900" indent="-342900">
               <a:spcAft>
-                <a:spcPts val="1200"/>
+                <a:spcPts val="1100"/>
               </a:spcAft>
               <a:buSzPct val="100000"/>
               <a:buChar char="•"/>
             </a:pPr>
             <a:r>
-              <a:rPr lang="en-US" sz="1700" dirty="0">
+              <a:rPr lang="en-US" sz="1600" dirty="0">
                 <a:solidFill>
                   <a:srgbClr val="1A1A2E"/>
                 </a:solidFill>
@@ -4082,18 +4082,18 @@
               </a:rPr>
               <a:t>Verified p-value floor: 5 replicates ⇒ smallest two-sided p = 0.0625 ⇒ smallest Holm-adjusted value ≈ 0.19 across 3 contrasts. 10 replicates ⇒ 0.00195.</a:t>
             </a:r>
-            <a:endParaRPr lang="en-US" sz="1700" dirty="0"/>
+            <a:endParaRPr lang="en-US" sz="1600" dirty="0"/>
           </a:p>
           <a:p>
             <a:pPr marL="342900" indent="-342900">
               <a:spcAft>
-                <a:spcPts val="1200"/>
+                <a:spcPts val="1100"/>
               </a:spcAft>
               <a:buSzPct val="100000"/>
               <a:buChar char="•"/>
             </a:pPr>
             <a:r>
-              <a:rPr lang="en-US" sz="1700" dirty="0">
+              <a:rPr lang="en-US" sz="1600" dirty="0">
                 <a:solidFill>
                   <a:srgbClr val="1A1A2E"/>
                 </a:solidFill>
@@ -4103,18 +4103,18 @@
               </a:rPr>
               <a:t>Seeds: data seed 1000+r, search seed 2000+r, shared by every arm in a comparison; θ-seed derived from (task, data seed, search seed, structural hash).</a:t>
             </a:r>
-            <a:endParaRPr lang="en-US" sz="1700" dirty="0"/>
+            <a:endParaRPr lang="en-US" sz="1600" dirty="0"/>
           </a:p>
           <a:p>
             <a:pPr marL="342900" indent="-342900">
               <a:spcAft>
-                <a:spcPts val="1200"/>
+                <a:spcPts val="1100"/>
               </a:spcAft>
               <a:buSzPct val="100000"/>
               <a:buChar char="•"/>
             </a:pPr>
             <a:r>
-              <a:rPr lang="en-US" sz="1700" dirty="0">
+              <a:rPr lang="en-US" sz="1600" dirty="0">
                 <a:solidFill>
                   <a:srgbClr val="1A1A2E"/>
                 </a:solidFill>
@@ -4122,9 +4122,30 @@
                 <a:ea typeface="Arial" pitchFamily="34" charset="-122"/>
                 <a:cs typeface="Arial" pitchFamily="34" charset="-120"/>
               </a:rPr>
-              <a:t>Protected test: evaluated once per cell, after selection is frozen; search modules cannot import the test gate (enforced by AST tests).</a:t>
-            </a:r>
-            <a:endParaRPr lang="en-US" sz="1700" dirty="0"/>
+              <a:t>Protected-test metric: the same metric formula used for validation, re-evaluated once per selected circuit on a final held-out split of 2,048 examples, after selection has been frozen. RMSE = sqrt(mean((ŷ − y)²)) for the regression tasks T1–T3; AUROC for the T4 classification task, which is why the pipeline-level term is "protected-test metric".</a:t>
+            </a:r>
+            <a:endParaRPr lang="en-US" sz="1600" dirty="0"/>
+          </a:p>
+          <a:p>
+            <a:pPr marL="342900" indent="-342900">
+              <a:spcAft>
+                <a:spcPts val="1100"/>
+              </a:spcAft>
+              <a:buSzPct val="100000"/>
+              <a:buChar char="•"/>
+            </a:pPr>
+            <a:r>
+              <a:rPr lang="en-US" sz="1600" dirty="0">
+                <a:solidFill>
+                  <a:srgbClr val="1A1A2E"/>
+                </a:solidFill>
+                <a:latin typeface="Arial" pitchFamily="34" charset="0"/>
+                <a:ea typeface="Arial" pitchFamily="34" charset="-122"/>
+                <a:cs typeface="Arial" pitchFamily="34" charset="-120"/>
+              </a:rPr>
+              <a:t>Search modules cannot import the test gate, and the restriction is enforced by an AST test rather than by convention.</a:t>
+            </a:r>
+            <a:endParaRPr lang="en-US" sz="1600" dirty="0"/>
           </a:p>
         </p:txBody>
       </p:sp>
@@ -4402,6 +4423,27 @@
             </a:r>
             <a:endParaRPr lang="en-US" sz="1700" dirty="0"/>
           </a:p>
+          <a:p>
+            <a:pPr marL="342900" indent="-342900">
+              <a:spcAft>
+                <a:spcPts val="1200"/>
+              </a:spcAft>
+              <a:buSzPct val="100000"/>
+              <a:buChar char="•"/>
+            </a:pPr>
+            <a:r>
+              <a:rPr lang="en-US" sz="1700" dirty="0">
+                <a:solidFill>
+                  <a:srgbClr val="1A1A2E"/>
+                </a:solidFill>
+                <a:latin typeface="Arial" pitchFamily="34" charset="0"/>
+                <a:ea typeface="Arial" pitchFamily="34" charset="-122"/>
+                <a:cs typeface="Arial" pitchFamily="34" charset="-120"/>
+              </a:rPr>
+              <a:t>Enforced parity for the LLM arms: one gate per rotation operation, entangler wires "all", and 1..floor(n/2) disjoint non-duplicate pairs — so no arm can pack several gate layers into one operation. A scan of all 25,973 operations produced by the completed classical search arms found zero violations, so the comparison already run is unaffected.</a:t>
+            </a:r>
+            <a:endParaRPr lang="en-US" sz="1700" dirty="0"/>
+          </a:p>
         </p:txBody>
       </p:sp>
       <p:sp>
@@ -4674,7 +4716,7 @@
                 <a:ea typeface="Arial" pitchFamily="34" charset="-122"/>
                 <a:cs typeface="Arial" pitchFamily="34" charset="-120"/>
               </a:rPr>
-              <a:t>Shot-noise (1,024 / 4,096) and the frozen depol_ro_v1 noisy profile are implemented but belong to E4, which has not run.</a:t>
+              <a:t>Shot-noise (1,024 / 4,096) and the frozen depol_ro_v1 noisy profile belong to E4, which re-evaluates the best-validation selected circuit of every completed E2/E3 cell — it needs no LLM cells, so it runs on the classical matrix.</a:t>
             </a:r>
             <a:endParaRPr lang="en-US" sz="1700" dirty="0"/>
           </a:p>
@@ -4823,7 +4865,7 @@
                 <a:ea typeface="Arial" pitchFamily="34" charset="-122"/>
                 <a:cs typeface="Arial" pitchFamily="34" charset="-120"/>
               </a:rPr>
-              <a:t>A11  API budget derivation</a:t>
+              <a:t>A11  API cost model and the cumulative cap</a:t>
             </a:r>
             <a:endParaRPr lang="en-US" sz="2600" dirty="0"/>
           </a:p>
@@ -4862,7 +4904,7 @@
                 <a:ea typeface="Arial" pitchFamily="34" charset="-122"/>
                 <a:cs typeface="Arial" pitchFamily="34" charset="-120"/>
               </a:rPr>
-              <a:t>Model not yet pinned — the cap, not the estimate, is what the code enforces</a:t>
+              <a:t>Priced from a dated manifest and settled from returned tokens — no flat per-call charge</a:t>
             </a:r>
             <a:endParaRPr lang="en-US" sz="1700" dirty="0"/>
           </a:p>
@@ -4883,7 +4925,7 @@
           </p:nvPr>
         </p:nvGraphicFramePr>
         <p:xfrm>
-          <a:off x="640080" y="1691640"/>
+          <a:off x="640080" y="1645920"/>
           <a:ext cx="10881360" cy="914400"/>
         </p:xfrm>
         <a:graphic>
@@ -4891,11 +4933,11 @@
             <a:tbl>
               <a:tblPr/>
               <a:tblGrid>
-                <a:gridCol w="3017520"/>
+                <a:gridCol w="2651760"/>
+                <a:gridCol w="4206240"/>
                 <a:gridCol w="4023360"/>
-                <a:gridCol w="3840480"/>
               </a:tblGrid>
-              <a:tr h="365760">
+              <a:tr h="384048">
                 <a:tc>
                   <a:txBody>
                     <a:bodyPr/>
@@ -4905,7 +4947,7 @@
                         <a:buNone/>
                       </a:pPr>
                       <a:r>
-                        <a:rPr lang="en-US" sz="1500" b="1" dirty="0">
+                        <a:rPr lang="en-US" sz="1300" b="1" dirty="0">
                           <a:solidFill>
                             <a:srgbClr val="FFFFFF"/>
                           </a:solidFill>
@@ -4915,7 +4957,7 @@
                         </a:rPr>
                         <a:t>Quantity</a:t>
                       </a:r>
-                      <a:endParaRPr lang="en-US" sz="1500" dirty="0">
+                      <a:endParaRPr lang="en-US" sz="1300" dirty="0">
                         <a:latin typeface="Arial" charset="0"/>
                         <a:ea typeface="Arial" charset="0"/>
                         <a:cs typeface="Arial" charset="0"/>
@@ -4973,7 +5015,7 @@
                         <a:buNone/>
                       </a:pPr>
                       <a:r>
-                        <a:rPr lang="en-US" sz="1500" b="1" dirty="0">
+                        <a:rPr lang="en-US" sz="1300" b="1" dirty="0">
                           <a:solidFill>
                             <a:srgbClr val="FFFFFF"/>
                           </a:solidFill>
@@ -4983,7 +5025,7 @@
                         </a:rPr>
                         <a:t>Value</a:t>
                       </a:r>
-                      <a:endParaRPr lang="en-US" sz="1500" dirty="0">
+                      <a:endParaRPr lang="en-US" sz="1300" dirty="0">
                         <a:latin typeface="Arial" charset="0"/>
                         <a:ea typeface="Arial" charset="0"/>
                         <a:cs typeface="Arial" charset="0"/>
@@ -5041,7 +5083,7 @@
                         <a:buNone/>
                       </a:pPr>
                       <a:r>
-                        <a:rPr lang="en-US" sz="1500" b="1" dirty="0">
+                        <a:rPr lang="en-US" sz="1300" b="1" dirty="0">
                           <a:solidFill>
                             <a:srgbClr val="FFFFFF"/>
                           </a:solidFill>
@@ -5051,7 +5093,7 @@
                         </a:rPr>
                         <a:t>Source</a:t>
                       </a:r>
-                      <a:endParaRPr lang="en-US" sz="1500" dirty="0">
+                      <a:endParaRPr lang="en-US" sz="1300" dirty="0">
                         <a:latin typeface="Arial" charset="0"/>
                         <a:ea typeface="Arial" charset="0"/>
                         <a:cs typeface="Arial" charset="0"/>
@@ -5101,7 +5143,7 @@
                   </a:tcPr>
                 </a:tc>
               </a:tr>
-              <a:tr h="365760">
+              <a:tr h="384048">
                 <a:tc>
                   <a:txBody>
                     <a:bodyPr/>
@@ -5111,7 +5153,7 @@
                         <a:buNone/>
                       </a:pPr>
                       <a:r>
-                        <a:rPr lang="en-US" sz="1500" dirty="0">
+                        <a:rPr lang="en-US" sz="1300" dirty="0">
                           <a:solidFill>
                             <a:srgbClr val="000000"/>
                           </a:solidFill>
@@ -5119,9 +5161,9 @@
                           <a:ea typeface="Arial" pitchFamily="34" charset="-122"/>
                           <a:cs typeface="Arial" pitchFamily="34" charset="-120"/>
                         </a:rPr>
-                        <a:t>Cells to run</a:t>
+                        <a:t>Pinned model</a:t>
                       </a:r>
-                      <a:endParaRPr lang="en-US" sz="1500" dirty="0">
+                      <a:endParaRPr lang="en-US" sz="1300" dirty="0">
                         <a:latin typeface="Arial" charset="0"/>
                         <a:ea typeface="Arial" charset="0"/>
                         <a:cs typeface="Arial" charset="0"/>
@@ -5176,7 +5218,7 @@
                         <a:buNone/>
                       </a:pPr>
                       <a:r>
-                        <a:rPr lang="en-US" sz="1500" dirty="0">
+                        <a:rPr lang="en-US" sz="1300" dirty="0">
                           <a:solidFill>
                             <a:srgbClr val="000000"/>
                           </a:solidFill>
@@ -5184,9 +5226,9 @@
                           <a:ea typeface="Arial" pitchFamily="34" charset="-122"/>
                           <a:cs typeface="Arial" pitchFamily="34" charset="-120"/>
                         </a:rPr>
-                        <a:t>220 (E1 60, E2 80, E3 80)</a:t>
+                        <a:t>gpt-5-nano-2025-08-07</a:t>
                       </a:r>
-                      <a:endParaRPr lang="en-US" sz="1500" dirty="0">
+                      <a:endParaRPr lang="en-US" sz="1300" dirty="0">
                         <a:latin typeface="Arial" charset="0"/>
                         <a:ea typeface="Arial" charset="0"/>
                         <a:cs typeface="Arial" charset="0"/>
@@ -5241,7 +5283,7 @@
                         <a:buNone/>
                       </a:pPr>
                       <a:r>
-                        <a:rPr lang="en-US" sz="1500" dirty="0">
+                        <a:rPr lang="en-US" sz="1300" dirty="0">
                           <a:solidFill>
                             <a:srgbClr val="000000"/>
                           </a:solidFill>
@@ -5249,9 +5291,9 @@
                           <a:ea typeface="Arial" pitchFamily="34" charset="-122"/>
                           <a:cs typeface="Arial" pitchFamily="34" charset="-120"/>
                         </a:rPr>
-                        <a:t>protocol_v2.yaml</a:t>
+                        <a:t>OPENAI_MODEL, verified before any client is built</a:t>
                       </a:r>
-                      <a:endParaRPr lang="en-US" sz="1500" dirty="0">
+                      <a:endParaRPr lang="en-US" sz="1300" dirty="0">
                         <a:latin typeface="Arial" charset="0"/>
                         <a:ea typeface="Arial" charset="0"/>
                         <a:cs typeface="Arial" charset="0"/>
@@ -5298,7 +5340,7 @@
                   </a:tcPr>
                 </a:tc>
               </a:tr>
-              <a:tr h="365760">
+              <a:tr h="384048">
                 <a:tc>
                   <a:txBody>
                     <a:bodyPr/>
@@ -5308,7 +5350,7 @@
                         <a:buNone/>
                       </a:pPr>
                       <a:r>
-                        <a:rPr lang="en-US" sz="1500" dirty="0">
+                        <a:rPr lang="en-US" sz="1300" dirty="0">
                           <a:solidFill>
                             <a:srgbClr val="000000"/>
                           </a:solidFill>
@@ -5316,9 +5358,9 @@
                           <a:ea typeface="Arial" pitchFamily="34" charset="-122"/>
                           <a:cs typeface="Arial" pitchFamily="34" charset="-120"/>
                         </a:rPr>
-                        <a:t>Candidates per call</a:t>
+                        <a:t>Price (dated manifest)</a:t>
                       </a:r>
-                      <a:endParaRPr lang="en-US" sz="1500" dirty="0">
+                      <a:endParaRPr lang="en-US" sz="1300" dirty="0">
                         <a:latin typeface="Arial" charset="0"/>
                         <a:ea typeface="Arial" charset="0"/>
                         <a:cs typeface="Arial" charset="0"/>
@@ -5373,7 +5415,7 @@
                         <a:buNone/>
                       </a:pPr>
                       <a:r>
-                        <a:rPr lang="en-US" sz="1500" dirty="0">
+                        <a:rPr lang="en-US" sz="1300" dirty="0">
                           <a:solidFill>
                             <a:srgbClr val="000000"/>
                           </a:solidFill>
@@ -5381,9 +5423,9 @@
                           <a:ea typeface="Arial" pitchFamily="34" charset="-122"/>
                           <a:cs typeface="Arial" pitchFamily="34" charset="-120"/>
                         </a:rPr>
-                        <a:t>3</a:t>
+                        <a:t>$0.05 / 1M input, $0.40 / 1M output</a:t>
                       </a:r>
-                      <a:endParaRPr lang="en-US" sz="1500" dirty="0">
+                      <a:endParaRPr lang="en-US" sz="1300" dirty="0">
                         <a:latin typeface="Arial" charset="0"/>
                         <a:ea typeface="Arial" charset="0"/>
                         <a:cs typeface="Arial" charset="0"/>
@@ -5438,7 +5480,7 @@
                         <a:buNone/>
                       </a:pPr>
                       <a:r>
-                        <a:rPr lang="en-US" sz="1500" dirty="0">
+                        <a:rPr lang="en-US" sz="1300" dirty="0">
                           <a:solidFill>
                             <a:srgbClr val="000000"/>
                           </a:solidFill>
@@ -5446,9 +5488,9 @@
                           <a:ea typeface="Arial" pitchFamily="34" charset="-122"/>
                           <a:cs typeface="Arial" pitchFamily="34" charset="-120"/>
                         </a:rPr>
-                        <a:t>llm_arms.py BATCH_SIZE</a:t>
+                        <a:t>configs/bench_v2/model_prices.json</a:t>
                       </a:r>
-                      <a:endParaRPr lang="en-US" sz="1500" dirty="0">
+                      <a:endParaRPr lang="en-US" sz="1300" dirty="0">
                         <a:latin typeface="Arial" charset="0"/>
                         <a:ea typeface="Arial" charset="0"/>
                         <a:cs typeface="Arial" charset="0"/>
@@ -5495,7 +5537,7 @@
                   </a:tcPr>
                 </a:tc>
               </a:tr>
-              <a:tr h="365760">
+              <a:tr h="384048">
                 <a:tc>
                   <a:txBody>
                     <a:bodyPr/>
@@ -5505,7 +5547,7 @@
                         <a:buNone/>
                       </a:pPr>
                       <a:r>
-                        <a:rPr lang="en-US" sz="1500" dirty="0">
+                        <a:rPr lang="en-US" sz="1300" dirty="0">
                           <a:solidFill>
                             <a:srgbClr val="000000"/>
                           </a:solidFill>
@@ -5513,9 +5555,9 @@
                           <a:ea typeface="Arial" pitchFamily="34" charset="-122"/>
                           <a:cs typeface="Arial" pitchFamily="34" charset="-120"/>
                         </a:rPr>
-                        <a:t>Expected calls per cell</a:t>
+                        <a:t>Cells to run</a:t>
                       </a:r>
-                      <a:endParaRPr lang="en-US" sz="1500" dirty="0">
+                      <a:endParaRPr lang="en-US" sz="1300" dirty="0">
                         <a:latin typeface="Arial" charset="0"/>
                         <a:ea typeface="Arial" charset="0"/>
                         <a:cs typeface="Arial" charset="0"/>
@@ -5570,7 +5612,7 @@
                         <a:buNone/>
                       </a:pPr>
                       <a:r>
-                        <a:rPr lang="en-US" sz="1500" dirty="0">
+                        <a:rPr lang="en-US" sz="1300" dirty="0">
                           <a:solidFill>
                             <a:srgbClr val="000000"/>
                           </a:solidFill>
@@ -5578,9 +5620,9 @@
                           <a:ea typeface="Arial" pitchFamily="34" charset="-122"/>
                           <a:cs typeface="Arial" pitchFamily="34" charset="-120"/>
                         </a:rPr>
-                        <a:t>6 (B=16) / 8 (B=24)</a:t>
+                        <a:t>220 (E1 60, E2 80, E3 80)</a:t>
                       </a:r>
-                      <a:endParaRPr lang="en-US" sz="1500" dirty="0">
+                      <a:endParaRPr lang="en-US" sz="1300" dirty="0">
                         <a:latin typeface="Arial" charset="0"/>
                         <a:ea typeface="Arial" charset="0"/>
                         <a:cs typeface="Arial" charset="0"/>
@@ -5635,7 +5677,7 @@
                         <a:buNone/>
                       </a:pPr>
                       <a:r>
-                        <a:rPr lang="en-US" sz="1500" dirty="0">
+                        <a:rPr lang="en-US" sz="1300" dirty="0">
                           <a:solidFill>
                             <a:srgbClr val="000000"/>
                           </a:solidFill>
@@ -5643,9 +5685,9 @@
                           <a:ea typeface="Arial" pitchFamily="34" charset="-122"/>
                           <a:cs typeface="Arial" pitchFamily="34" charset="-120"/>
                         </a:rPr>
-                        <a:t>ceil(B/3) + duplicate allowance</a:t>
+                        <a:t>protocol_v2.yaml</a:t>
                       </a:r>
-                      <a:endParaRPr lang="en-US" sz="1500" dirty="0">
+                      <a:endParaRPr lang="en-US" sz="1300" dirty="0">
                         <a:latin typeface="Arial" charset="0"/>
                         <a:ea typeface="Arial" charset="0"/>
                         <a:cs typeface="Arial" charset="0"/>
@@ -5692,7 +5734,7 @@
                   </a:tcPr>
                 </a:tc>
               </a:tr>
-              <a:tr h="365760">
+              <a:tr h="384048">
                 <a:tc>
                   <a:txBody>
                     <a:bodyPr/>
@@ -5702,7 +5744,7 @@
                         <a:buNone/>
                       </a:pPr>
                       <a:r>
-                        <a:rPr lang="en-US" sz="1500" dirty="0">
+                        <a:rPr lang="en-US" sz="1300" dirty="0">
                           <a:solidFill>
                             <a:srgbClr val="000000"/>
                           </a:solidFill>
@@ -5710,9 +5752,9 @@
                           <a:ea typeface="Arial" pitchFamily="34" charset="-122"/>
                           <a:cs typeface="Arial" pitchFamily="34" charset="-120"/>
                         </a:rPr>
-                        <a:t>Expected total calls</a:t>
+                        <a:t>Candidates per call</a:t>
                       </a:r>
-                      <a:endParaRPr lang="en-US" sz="1500" dirty="0">
+                      <a:endParaRPr lang="en-US" sz="1300" dirty="0">
                         <a:latin typeface="Arial" charset="0"/>
                         <a:ea typeface="Arial" charset="0"/>
                         <a:cs typeface="Arial" charset="0"/>
@@ -5767,7 +5809,7 @@
                         <a:buNone/>
                       </a:pPr>
                       <a:r>
-                        <a:rPr lang="en-US" sz="1500" dirty="0">
+                        <a:rPr lang="en-US" sz="1300" dirty="0">
                           <a:solidFill>
                             <a:srgbClr val="000000"/>
                           </a:solidFill>
@@ -5775,9 +5817,9 @@
                           <a:ea typeface="Arial" pitchFamily="34" charset="-122"/>
                           <a:cs typeface="Arial" pitchFamily="34" charset="-120"/>
                         </a:rPr>
-                        <a:t>≈1,480</a:t>
+                        <a:t>3</a:t>
                       </a:r>
-                      <a:endParaRPr lang="en-US" sz="1500" dirty="0">
+                      <a:endParaRPr lang="en-US" sz="1300" dirty="0">
                         <a:latin typeface="Arial" charset="0"/>
                         <a:ea typeface="Arial" charset="0"/>
                         <a:cs typeface="Arial" charset="0"/>
@@ -5832,7 +5874,7 @@
                         <a:buNone/>
                       </a:pPr>
                       <a:r>
-                        <a:rPr lang="en-US" sz="1500" dirty="0">
+                        <a:rPr lang="en-US" sz="1300" dirty="0">
                           <a:solidFill>
                             <a:srgbClr val="000000"/>
                           </a:solidFill>
@@ -5840,9 +5882,9 @@
                           <a:ea typeface="Arial" pitchFamily="34" charset="-122"/>
                           <a:cs typeface="Arial" pitchFamily="34" charset="-120"/>
                         </a:rPr>
-                        <a:t>derived</a:t>
+                        <a:t>llm_arms.py BATCH_SIZE</a:t>
                       </a:r>
-                      <a:endParaRPr lang="en-US" sz="1500" dirty="0">
+                      <a:endParaRPr lang="en-US" sz="1300" dirty="0">
                         <a:latin typeface="Arial" charset="0"/>
                         <a:ea typeface="Arial" charset="0"/>
                         <a:cs typeface="Arial" charset="0"/>
@@ -5889,7 +5931,7 @@
                   </a:tcPr>
                 </a:tc>
               </a:tr>
-              <a:tr h="365760">
+              <a:tr h="384048">
                 <a:tc>
                   <a:txBody>
                     <a:bodyPr/>
@@ -5899,7 +5941,7 @@
                         <a:buNone/>
                       </a:pPr>
                       <a:r>
-                        <a:rPr lang="en-US" sz="1500" dirty="0">
+                        <a:rPr lang="en-US" sz="1300" dirty="0">
                           <a:solidFill>
                             <a:srgbClr val="000000"/>
                           </a:solidFill>
@@ -5907,9 +5949,9 @@
                           <a:ea typeface="Arial" pitchFamily="34" charset="-122"/>
                           <a:cs typeface="Arial" pitchFamily="34" charset="-120"/>
                         </a:rPr>
-                        <a:t>Reserved per call</a:t>
+                        <a:t>Expected total calls</a:t>
                       </a:r>
-                      <a:endParaRPr lang="en-US" sz="1500" dirty="0">
+                      <a:endParaRPr lang="en-US" sz="1300" dirty="0">
                         <a:latin typeface="Arial" charset="0"/>
                         <a:ea typeface="Arial" charset="0"/>
                         <a:cs typeface="Arial" charset="0"/>
@@ -5964,7 +6006,7 @@
                         <a:buNone/>
                       </a:pPr>
                       <a:r>
-                        <a:rPr lang="en-US" sz="1500" dirty="0">
+                        <a:rPr lang="en-US" sz="1300" dirty="0">
                           <a:solidFill>
                             <a:srgbClr val="000000"/>
                           </a:solidFill>
@@ -5972,9 +6014,9 @@
                           <a:ea typeface="Arial" pitchFamily="34" charset="-122"/>
                           <a:cs typeface="Arial" pitchFamily="34" charset="-120"/>
                         </a:rPr>
-                        <a:t>$0.05</a:t>
+                        <a:t>≈1,480</a:t>
                       </a:r>
-                      <a:endParaRPr lang="en-US" sz="1500" dirty="0">
+                      <a:endParaRPr lang="en-US" sz="1300" dirty="0">
                         <a:latin typeface="Arial" charset="0"/>
                         <a:ea typeface="Arial" charset="0"/>
                         <a:cs typeface="Arial" charset="0"/>
@@ -6029,7 +6071,7 @@
                         <a:buNone/>
                       </a:pPr>
                       <a:r>
-                        <a:rPr lang="en-US" sz="1500" dirty="0">
+                        <a:rPr lang="en-US" sz="1300" dirty="0">
                           <a:solidFill>
                             <a:srgbClr val="000000"/>
                           </a:solidFill>
@@ -6037,9 +6079,9 @@
                           <a:ea typeface="Arial" pitchFamily="34" charset="-122"/>
                           <a:cs typeface="Arial" pitchFamily="34" charset="-120"/>
                         </a:rPr>
-                        <a:t>openai_provider.py</a:t>
+                        <a:t>ceil(B/3) + duplicate allowance, over 220 cells</a:t>
                       </a:r>
-                      <a:endParaRPr lang="en-US" sz="1500" dirty="0">
+                      <a:endParaRPr lang="en-US" sz="1300" dirty="0">
                         <a:latin typeface="Arial" charset="0"/>
                         <a:ea typeface="Arial" charset="0"/>
                         <a:cs typeface="Arial" charset="0"/>
@@ -6086,7 +6128,7 @@
                   </a:tcPr>
                 </a:tc>
               </a:tr>
-              <a:tr h="365760">
+              <a:tr h="384048">
                 <a:tc>
                   <a:txBody>
                     <a:bodyPr/>
@@ -6096,7 +6138,7 @@
                         <a:buNone/>
                       </a:pPr>
                       <a:r>
-                        <a:rPr lang="en-US" sz="1500" dirty="0">
+                        <a:rPr lang="en-US" sz="1300" dirty="0">
                           <a:solidFill>
                             <a:srgbClr val="000000"/>
                           </a:solidFill>
@@ -6104,9 +6146,9 @@
                           <a:ea typeface="Arial" pitchFamily="34" charset="-122"/>
                           <a:cs typeface="Arial" pitchFamily="34" charset="-120"/>
                         </a:rPr>
-                        <a:t>Expected reservation</a:t>
+                        <a:t>Expected cost per call</a:t>
                       </a:r>
-                      <a:endParaRPr lang="en-US" sz="1500" dirty="0">
+                      <a:endParaRPr lang="en-US" sz="1300" dirty="0">
                         <a:latin typeface="Arial" charset="0"/>
                         <a:ea typeface="Arial" charset="0"/>
                         <a:cs typeface="Arial" charset="0"/>
@@ -6161,7 +6203,7 @@
                         <a:buNone/>
                       </a:pPr>
                       <a:r>
-                        <a:rPr lang="en-US" sz="1500" dirty="0">
+                        <a:rPr lang="en-US" sz="1300" dirty="0">
                           <a:solidFill>
                             <a:srgbClr val="000000"/>
                           </a:solidFill>
@@ -6169,9 +6211,9 @@
                           <a:ea typeface="Arial" pitchFamily="34" charset="-122"/>
                           <a:cs typeface="Arial" pitchFamily="34" charset="-120"/>
                         </a:rPr>
-                        <a:t>$74</a:t>
+                        <a:t>≈$0.0004</a:t>
                       </a:r>
-                      <a:endParaRPr lang="en-US" sz="1500" dirty="0">
+                      <a:endParaRPr lang="en-US" sz="1300" dirty="0">
                         <a:latin typeface="Arial" charset="0"/>
                         <a:ea typeface="Arial" charset="0"/>
                         <a:cs typeface="Arial" charset="0"/>
@@ -6226,7 +6268,7 @@
                         <a:buNone/>
                       </a:pPr>
                       <a:r>
-                        <a:rPr lang="en-US" sz="1500" dirty="0">
+                        <a:rPr lang="en-US" sz="1300" dirty="0">
                           <a:solidFill>
                             <a:srgbClr val="000000"/>
                           </a:solidFill>
@@ -6234,9 +6276,9 @@
                           <a:ea typeface="Arial" pitchFamily="34" charset="-122"/>
                           <a:cs typeface="Arial" pitchFamily="34" charset="-120"/>
                         </a:rPr>
-                        <a:t>1,480 × $0.05</a:t>
+                        <a:t>measured prompt size × manifest price</a:t>
                       </a:r>
-                      <a:endParaRPr lang="en-US" sz="1500" dirty="0">
+                      <a:endParaRPr lang="en-US" sz="1300" dirty="0">
                         <a:latin typeface="Arial" charset="0"/>
                         <a:ea typeface="Arial" charset="0"/>
                         <a:cs typeface="Arial" charset="0"/>
@@ -6283,7 +6325,7 @@
                   </a:tcPr>
                 </a:tc>
               </a:tr>
-              <a:tr h="365760">
+              <a:tr h="384048">
                 <a:tc>
                   <a:txBody>
                     <a:bodyPr/>
@@ -6293,7 +6335,7 @@
                         <a:buNone/>
                       </a:pPr>
                       <a:r>
-                        <a:rPr lang="en-US" sz="1500" dirty="0">
+                        <a:rPr lang="en-US" sz="1300" dirty="0">
                           <a:solidFill>
                             <a:srgbClr val="000000"/>
                           </a:solidFill>
@@ -6301,9 +6343,9 @@
                           <a:ea typeface="Arial" pitchFamily="34" charset="-122"/>
                           <a:cs typeface="Arial" pitchFamily="34" charset="-120"/>
                         </a:rPr>
-                        <a:t>Per-cell call guard</a:t>
+                        <a:t>Expected total cost</a:t>
                       </a:r>
-                      <a:endParaRPr lang="en-US" sz="1500" dirty="0">
+                      <a:endParaRPr lang="en-US" sz="1300" dirty="0">
                         <a:latin typeface="Arial" charset="0"/>
                         <a:ea typeface="Arial" charset="0"/>
                         <a:cs typeface="Arial" charset="0"/>
@@ -6358,7 +6400,7 @@
                         <a:buNone/>
                       </a:pPr>
                       <a:r>
-                        <a:rPr lang="en-US" sz="1500" dirty="0">
+                        <a:rPr lang="en-US" sz="1300" dirty="0">
                           <a:solidFill>
                             <a:srgbClr val="000000"/>
                           </a:solidFill>
@@ -6366,9 +6408,9 @@
                           <a:ea typeface="Arial" pitchFamily="34" charset="-122"/>
                           <a:cs typeface="Arial" pitchFamily="34" charset="-120"/>
                         </a:rPr>
-                        <a:t>40 calls (failure guard, not normal use)</a:t>
+                        <a:t>≈$0.6</a:t>
                       </a:r>
-                      <a:endParaRPr lang="en-US" sz="1500" dirty="0">
+                      <a:endParaRPr lang="en-US" sz="1300" dirty="0">
                         <a:latin typeface="Arial" charset="0"/>
                         <a:ea typeface="Arial" charset="0"/>
                         <a:cs typeface="Arial" charset="0"/>
@@ -6423,7 +6465,7 @@
                         <a:buNone/>
                       </a:pPr>
                       <a:r>
-                        <a:rPr lang="en-US" sz="1500" dirty="0">
+                        <a:rPr lang="en-US" sz="1300" dirty="0">
                           <a:solidFill>
                             <a:srgbClr val="000000"/>
                           </a:solidFill>
@@ -6431,9 +6473,9 @@
                           <a:ea typeface="Arial" pitchFamily="34" charset="-122"/>
                           <a:cs typeface="Arial" pitchFamily="34" charset="-120"/>
                         </a:rPr>
-                        <a:t>llm_providers.py</a:t>
+                        <a:t>1,480 × $0.0004</a:t>
                       </a:r>
-                      <a:endParaRPr lang="en-US" sz="1500" dirty="0">
+                      <a:endParaRPr lang="en-US" sz="1300" dirty="0">
                         <a:latin typeface="Arial" charset="0"/>
                         <a:ea typeface="Arial" charset="0"/>
                         <a:cs typeface="Arial" charset="0"/>
@@ -6480,7 +6522,7 @@
                   </a:tcPr>
                 </a:tc>
               </a:tr>
-              <a:tr h="365760">
+              <a:tr h="384048">
                 <a:tc>
                   <a:txBody>
                     <a:bodyPr/>
@@ -6490,7 +6532,7 @@
                         <a:buNone/>
                       </a:pPr>
                       <a:r>
-                        <a:rPr lang="en-US" sz="1500" dirty="0">
+                        <a:rPr lang="en-US" sz="1300" dirty="0">
                           <a:solidFill>
                             <a:srgbClr val="000000"/>
                           </a:solidFill>
@@ -6498,9 +6540,9 @@
                           <a:ea typeface="Arial" pitchFamily="34" charset="-122"/>
                           <a:cs typeface="Arial" pitchFamily="34" charset="-120"/>
                         </a:rPr>
-                        <a:t>Absolute worst case</a:t>
+                        <a:t>Per-cell call guard</a:t>
                       </a:r>
-                      <a:endParaRPr lang="en-US" sz="1500" dirty="0">
+                      <a:endParaRPr lang="en-US" sz="1300" dirty="0">
                         <a:latin typeface="Arial" charset="0"/>
                         <a:ea typeface="Arial" charset="0"/>
                         <a:cs typeface="Arial" charset="0"/>
@@ -6555,7 +6597,7 @@
                         <a:buNone/>
                       </a:pPr>
                       <a:r>
-                        <a:rPr lang="en-US" sz="1500" dirty="0">
+                        <a:rPr lang="en-US" sz="1300" dirty="0">
                           <a:solidFill>
                             <a:srgbClr val="000000"/>
                           </a:solidFill>
@@ -6563,9 +6605,9 @@
                           <a:ea typeface="Arial" pitchFamily="34" charset="-122"/>
                           <a:cs typeface="Arial" pitchFamily="34" charset="-120"/>
                         </a:rPr>
-                        <a:t>$440 if every cell hit the guard</a:t>
+                        <a:t>40 calls (runaway guard — NOT the global cap)</a:t>
                       </a:r>
-                      <a:endParaRPr lang="en-US" sz="1500" dirty="0">
+                      <a:endParaRPr lang="en-US" sz="1300" dirty="0">
                         <a:latin typeface="Arial" charset="0"/>
                         <a:ea typeface="Arial" charset="0"/>
                         <a:cs typeface="Arial" charset="0"/>
@@ -6620,7 +6662,7 @@
                         <a:buNone/>
                       </a:pPr>
                       <a:r>
-                        <a:rPr lang="en-US" sz="1500" dirty="0">
+                        <a:rPr lang="en-US" sz="1300" dirty="0">
                           <a:solidFill>
                             <a:srgbClr val="000000"/>
                           </a:solidFill>
@@ -6628,9 +6670,9 @@
                           <a:ea typeface="Arial" pitchFamily="34" charset="-122"/>
                           <a:cs typeface="Arial" pitchFamily="34" charset="-120"/>
                         </a:rPr>
-                        <a:t>8,800 × $0.05</a:t>
+                        <a:t>llm_providers.py</a:t>
                       </a:r>
-                      <a:endParaRPr lang="en-US" sz="1500" dirty="0">
+                      <a:endParaRPr lang="en-US" sz="1300" dirty="0">
                         <a:latin typeface="Arial" charset="0"/>
                         <a:ea typeface="Arial" charset="0"/>
                         <a:cs typeface="Arial" charset="0"/>
@@ -6677,7 +6719,7 @@
                   </a:tcPr>
                 </a:tc>
               </a:tr>
-              <a:tr h="365760">
+              <a:tr h="384048">
                 <a:tc>
                   <a:txBody>
                     <a:bodyPr/>
@@ -6687,7 +6729,7 @@
                         <a:buNone/>
                       </a:pPr>
                       <a:r>
-                        <a:rPr lang="en-US" sz="1500" dirty="0">
+                        <a:rPr lang="en-US" sz="1300" dirty="0">
                           <a:solidFill>
                             <a:srgbClr val="000000"/>
                           </a:solidFill>
@@ -6695,9 +6737,9 @@
                           <a:ea typeface="Arial" pitchFamily="34" charset="-122"/>
                           <a:cs typeface="Arial" pitchFamily="34" charset="-120"/>
                         </a:rPr>
-                        <a:t>Requested hard cap</a:t>
+                        <a:t>Cumulative global cap</a:t>
                       </a:r>
-                      <a:endParaRPr lang="en-US" sz="1500" dirty="0">
+                      <a:endParaRPr lang="en-US" sz="1300" dirty="0">
                         <a:latin typeface="Arial" charset="0"/>
                         <a:ea typeface="Arial" charset="0"/>
                         <a:cs typeface="Arial" charset="0"/>
@@ -6752,7 +6794,7 @@
                         <a:buNone/>
                       </a:pPr>
                       <a:r>
-                        <a:rPr lang="en-US" sz="1500" dirty="0">
+                        <a:rPr lang="en-US" sz="1300" dirty="0">
                           <a:solidFill>
                             <a:srgbClr val="000000"/>
                           </a:solidFill>
@@ -6760,9 +6802,9 @@
                           <a:ea typeface="Arial" pitchFamily="34" charset="-122"/>
                           <a:cs typeface="Arial" pitchFamily="34" charset="-120"/>
                         </a:rPr>
-                        <a:t>$120</a:t>
+                        <a:t>$2.00, durable across cells, retries and restarts</a:t>
                       </a:r>
-                      <a:endParaRPr lang="en-US" sz="1500" dirty="0">
+                      <a:endParaRPr lang="en-US" sz="1300" dirty="0">
                         <a:latin typeface="Arial" charset="0"/>
                         <a:ea typeface="Arial" charset="0"/>
                         <a:cs typeface="Arial" charset="0"/>
@@ -6817,7 +6859,7 @@
                         <a:buNone/>
                       </a:pPr>
                       <a:r>
-                        <a:rPr lang="en-US" sz="1500" dirty="0">
+                        <a:rPr lang="en-US" sz="1300" dirty="0">
                           <a:solidFill>
                             <a:srgbClr val="000000"/>
                           </a:solidFill>
@@ -6825,9 +6867,9 @@
                           <a:ea typeface="Arial" pitchFamily="34" charset="-122"/>
                           <a:cs typeface="Arial" pitchFamily="34" charset="-120"/>
                         </a:rPr>
-                        <a:t>covers expected run with headroom</a:t>
+                        <a:t>GlobalSpendLedger (SQLite, BEGIN IMMEDIATE)</a:t>
                       </a:r>
-                      <a:endParaRPr lang="en-US" sz="1500" dirty="0">
+                      <a:endParaRPr lang="en-US" sz="1300" dirty="0">
                         <a:latin typeface="Arial" charset="0"/>
                         <a:ea typeface="Arial" charset="0"/>
                         <a:cs typeface="Arial" charset="0"/>
@@ -6874,6 +6916,203 @@
                   </a:tcPr>
                 </a:tc>
               </a:tr>
+              <a:tr h="384048">
+                <a:tc>
+                  <a:txBody>
+                    <a:bodyPr/>
+                    <a:lstStyle/>
+                    <a:p>
+                      <a:pPr indent="0" marL="0">
+                        <a:buNone/>
+                      </a:pPr>
+                      <a:r>
+                        <a:rPr lang="en-US" sz="1300" dirty="0">
+                          <a:solidFill>
+                            <a:srgbClr val="000000"/>
+                          </a:solidFill>
+                          <a:latin typeface="Arial" pitchFamily="34" charset="0"/>
+                          <a:ea typeface="Arial" pitchFamily="34" charset="-122"/>
+                          <a:cs typeface="Arial" pitchFamily="34" charset="-120"/>
+                        </a:rPr>
+                        <a:t>Actual measured spend</a:t>
+                      </a:r>
+                      <a:endParaRPr lang="en-US" sz="1300" dirty="0">
+                        <a:latin typeface="Arial" charset="0"/>
+                        <a:ea typeface="Arial" charset="0"/>
+                        <a:cs typeface="Arial" charset="0"/>
+                      </a:endParaRPr>
+                    </a:p>
+                  </a:txBody>
+                  <a:tcPr marL="54864" marR="54864" marT="54864" marB="54864" anchor="ctr">
+                    <a:lnL w="9525" cap="flat" cmpd="sng" algn="ctr">
+                      <a:solidFill>
+                        <a:srgbClr val="D5DAE3"/>
+                      </a:solidFill>
+                      <a:prstDash val="solid"/>
+                      <a:round/>
+                      <a:headEnd type="none" w="med" len="med"/>
+                      <a:tailEnd type="none" w="med" len="med"/>
+                    </a:lnL>
+                    <a:lnR w="9525" cap="flat" cmpd="sng" algn="ctr">
+                      <a:solidFill>
+                        <a:srgbClr val="D5DAE3"/>
+                      </a:solidFill>
+                      <a:prstDash val="solid"/>
+                      <a:round/>
+                      <a:headEnd type="none" w="med" len="med"/>
+                      <a:tailEnd type="none" w="med" len="med"/>
+                    </a:lnR>
+                    <a:lnT w="9525" cap="flat" cmpd="sng" algn="ctr">
+                      <a:solidFill>
+                        <a:srgbClr val="D5DAE3"/>
+                      </a:solidFill>
+                      <a:prstDash val="solid"/>
+                      <a:round/>
+                      <a:headEnd type="none" w="med" len="med"/>
+                      <a:tailEnd type="none" w="med" len="med"/>
+                    </a:lnT>
+                    <a:lnB w="9525" cap="flat" cmpd="sng" algn="ctr">
+                      <a:solidFill>
+                        <a:srgbClr val="D5DAE3"/>
+                      </a:solidFill>
+                      <a:prstDash val="solid"/>
+                      <a:round/>
+                      <a:headEnd type="none" w="med" len="med"/>
+                      <a:tailEnd type="none" w="med" len="med"/>
+                    </a:lnB>
+                  </a:tcPr>
+                </a:tc>
+                <a:tc>
+                  <a:txBody>
+                    <a:bodyPr/>
+                    <a:lstStyle/>
+                    <a:p>
+                      <a:pPr indent="0" marL="0">
+                        <a:buNone/>
+                      </a:pPr>
+                      <a:r>
+                        <a:rPr lang="en-US" sz="1300" dirty="0">
+                          <a:solidFill>
+                            <a:srgbClr val="000000"/>
+                          </a:solidFill>
+                          <a:latin typeface="Arial" pitchFamily="34" charset="0"/>
+                          <a:ea typeface="Arial" pitchFamily="34" charset="-122"/>
+                          <a:cs typeface="Arial" pitchFamily="34" charset="-120"/>
+                        </a:rPr>
+                        <a:t>$0.00 — 0 settled calls; account returned insufficient_quota</a:t>
+                      </a:r>
+                      <a:endParaRPr lang="en-US" sz="1300" dirty="0">
+                        <a:latin typeface="Arial" charset="0"/>
+                        <a:ea typeface="Arial" charset="0"/>
+                        <a:cs typeface="Arial" charset="0"/>
+                      </a:endParaRPr>
+                    </a:p>
+                  </a:txBody>
+                  <a:tcPr marL="54864" marR="54864" marT="54864" marB="54864" anchor="ctr">
+                    <a:lnL w="9525" cap="flat" cmpd="sng" algn="ctr">
+                      <a:solidFill>
+                        <a:srgbClr val="D5DAE3"/>
+                      </a:solidFill>
+                      <a:prstDash val="solid"/>
+                      <a:round/>
+                      <a:headEnd type="none" w="med" len="med"/>
+                      <a:tailEnd type="none" w="med" len="med"/>
+                    </a:lnL>
+                    <a:lnR w="9525" cap="flat" cmpd="sng" algn="ctr">
+                      <a:solidFill>
+                        <a:srgbClr val="D5DAE3"/>
+                      </a:solidFill>
+                      <a:prstDash val="solid"/>
+                      <a:round/>
+                      <a:headEnd type="none" w="med" len="med"/>
+                      <a:tailEnd type="none" w="med" len="med"/>
+                    </a:lnR>
+                    <a:lnT w="9525" cap="flat" cmpd="sng" algn="ctr">
+                      <a:solidFill>
+                        <a:srgbClr val="D5DAE3"/>
+                      </a:solidFill>
+                      <a:prstDash val="solid"/>
+                      <a:round/>
+                      <a:headEnd type="none" w="med" len="med"/>
+                      <a:tailEnd type="none" w="med" len="med"/>
+                    </a:lnT>
+                    <a:lnB w="9525" cap="flat" cmpd="sng" algn="ctr">
+                      <a:solidFill>
+                        <a:srgbClr val="D5DAE3"/>
+                      </a:solidFill>
+                      <a:prstDash val="solid"/>
+                      <a:round/>
+                      <a:headEnd type="none" w="med" len="med"/>
+                      <a:tailEnd type="none" w="med" len="med"/>
+                    </a:lnB>
+                  </a:tcPr>
+                </a:tc>
+                <a:tc>
+                  <a:txBody>
+                    <a:bodyPr/>
+                    <a:lstStyle/>
+                    <a:p>
+                      <a:pPr indent="0" marL="0">
+                        <a:buNone/>
+                      </a:pPr>
+                      <a:r>
+                        <a:rPr lang="en-US" sz="1300" dirty="0">
+                          <a:solidFill>
+                            <a:srgbClr val="000000"/>
+                          </a:solidFill>
+                          <a:latin typeface="Arial" pitchFamily="34" charset="0"/>
+                          <a:ea typeface="Arial" pitchFamily="34" charset="-122"/>
+                          <a:cs typeface="Arial" pitchFamily="34" charset="-120"/>
+                        </a:rPr>
+                        <a:t>runs/bench_v2/preflight_ledger.sqlite</a:t>
+                      </a:r>
+                      <a:endParaRPr lang="en-US" sz="1300" dirty="0">
+                        <a:latin typeface="Arial" charset="0"/>
+                        <a:ea typeface="Arial" charset="0"/>
+                        <a:cs typeface="Arial" charset="0"/>
+                      </a:endParaRPr>
+                    </a:p>
+                  </a:txBody>
+                  <a:tcPr marL="54864" marR="54864" marT="54864" marB="54864" anchor="ctr">
+                    <a:lnL w="9525" cap="flat" cmpd="sng" algn="ctr">
+                      <a:solidFill>
+                        <a:srgbClr val="D5DAE3"/>
+                      </a:solidFill>
+                      <a:prstDash val="solid"/>
+                      <a:round/>
+                      <a:headEnd type="none" w="med" len="med"/>
+                      <a:tailEnd type="none" w="med" len="med"/>
+                    </a:lnL>
+                    <a:lnR w="9525" cap="flat" cmpd="sng" algn="ctr">
+                      <a:solidFill>
+                        <a:srgbClr val="D5DAE3"/>
+                      </a:solidFill>
+                      <a:prstDash val="solid"/>
+                      <a:round/>
+                      <a:headEnd type="none" w="med" len="med"/>
+                      <a:tailEnd type="none" w="med" len="med"/>
+                    </a:lnR>
+                    <a:lnT w="9525" cap="flat" cmpd="sng" algn="ctr">
+                      <a:solidFill>
+                        <a:srgbClr val="D5DAE3"/>
+                      </a:solidFill>
+                      <a:prstDash val="solid"/>
+                      <a:round/>
+                      <a:headEnd type="none" w="med" len="med"/>
+                      <a:tailEnd type="none" w="med" len="med"/>
+                    </a:lnT>
+                    <a:lnB w="9525" cap="flat" cmpd="sng" algn="ctr">
+                      <a:solidFill>
+                        <a:srgbClr val="D5DAE3"/>
+                      </a:solidFill>
+                      <a:prstDash val="solid"/>
+                      <a:round/>
+                      <a:headEnd type="none" w="med" len="med"/>
+                      <a:tailEnd type="none" w="med" len="med"/>
+                    </a:lnB>
+                  </a:tcPr>
+                </a:tc>
+              </a:tr>
             </a:tbl>
           </a:graphicData>
         </a:graphic>
@@ -6911,7 +7150,7 @@
                 <a:ea typeface="Arial" pitchFamily="34" charset="-122"/>
                 <a:cs typeface="Arial" pitchFamily="34" charset="-120"/>
               </a:rPr>
-              <a:t>Enforcement: LLMApiBudget.from_env refuses to run without a positive cap; every retry is itself budget-checked</a:t>
+              <a:t>Cost is reserved before each request and settled from returned token counts; a claim that would exceed the cumulative cap is refused before the request is issued</a:t>
             </a:r>
             <a:endParaRPr lang="en-US" sz="1100" dirty="0"/>
           </a:p>
@@ -7085,7 +7324,28 @@
                 <a:ea typeface="Arial" pitchFamily="34" charset="-122"/>
                 <a:cs typeface="Arial" pitchFamily="34" charset="-120"/>
               </a:rPr>
-              <a:t>Completion contract: 17 machine-checked criteria; currently 9 pass. The failures are correct (missing LLM cells, E4, final report) and the checker was not modified.</a:t>
+              <a:t>Completion contract: 17 machine-checked criteria; currently 10 pass. The failures are correct (missing LLM cells, E4/E5 markers, final report) and the checker was not modified.</a:t>
+            </a:r>
+            <a:endParaRPr lang="en-US" sz="1700" dirty="0"/>
+          </a:p>
+          <a:p>
+            <a:pPr marL="342900" indent="-342900">
+              <a:spcAft>
+                <a:spcPts val="1300"/>
+              </a:spcAft>
+              <a:buSzPct val="100000"/>
+              <a:buChar char="•"/>
+            </a:pPr>
+            <a:r>
+              <a:rPr lang="en-US" sz="1700" dirty="0">
+                <a:solidFill>
+                  <a:srgbClr val="1A1A2E"/>
+                </a:solidFill>
+                <a:latin typeface="Arial" pitchFamily="34" charset="0"/>
+                <a:ea typeface="Arial" pitchFamily="34" charset="-122"/>
+                <a:cs typeface="Arial" pitchFamily="34" charset="-120"/>
+              </a:rPr>
+              <a:t>The self-consistent budget break that once evaded the ledger test is now closed twice over: the cumulative SQLite ledger is proved to survive a restart in a separate OS process, and a cap breach is refused before the request is issued rather than detected after it.</a:t>
             </a:r>
             <a:endParaRPr lang="en-US" sz="1700" dirty="0"/>
           </a:p>
@@ -7710,8 +7970,8 @@
         </p:nvSpPr>
         <p:spPr>
           <a:xfrm>
-            <a:off x="640080" y="4315968"/>
-            <a:ext cx="10972800" cy="1920240"/>
+            <a:off x="640080" y="4206240"/>
+            <a:ext cx="10972800" cy="2057400"/>
           </a:xfrm>
           <a:prstGeom prst="rect">
             <a:avLst/>
@@ -7725,13 +7985,13 @@
           <a:p>
             <a:pPr marL="342900" indent="-342900">
               <a:spcAft>
-                <a:spcPts val="1100"/>
+                <a:spcPts val="1000"/>
               </a:spcAft>
               <a:buSzPct val="100000"/>
               <a:buChar char="•"/>
             </a:pPr>
             <a:r>
-              <a:rPr lang="en-US" sz="1900" dirty="0">
+              <a:rPr lang="en-US" sz="1700" dirty="0">
                 <a:solidFill>
                   <a:srgbClr val="1A1A2E"/>
                 </a:solidFill>
@@ -7741,18 +8001,18 @@
               </a:rPr>
               <a:t>A length-2ⁿ signal fills the amplitudes of n qubits exactly — no padding, no truncation.</a:t>
             </a:r>
-            <a:endParaRPr lang="en-US" sz="1900" dirty="0"/>
+            <a:endParaRPr lang="en-US" sz="1700" dirty="0"/>
           </a:p>
           <a:p>
             <a:pPr marL="342900" indent="-342900">
               <a:spcAft>
-                <a:spcPts val="1100"/>
+                <a:spcPts val="1000"/>
               </a:spcAft>
               <a:buSzPct val="100000"/>
               <a:buChar char="•"/>
             </a:pPr>
             <a:r>
-              <a:rPr lang="en-US" sz="1900" dirty="0">
+              <a:rPr lang="en-US" sz="1700" dirty="0">
                 <a:solidFill>
                   <a:srgbClr val="1A1A2E"/>
                 </a:solidFill>
@@ -7762,18 +8022,18 @@
               </a:rPr>
               <a:t>Zero classical parameters: no trainable dense layer anywhere, so a weak circuit cannot be rescued by a classical head.</a:t>
             </a:r>
-            <a:endParaRPr lang="en-US" sz="1900" dirty="0"/>
+            <a:endParaRPr lang="en-US" sz="1700" dirty="0"/>
           </a:p>
           <a:p>
             <a:pPr marL="342900" indent="-342900">
               <a:spcAft>
-                <a:spcPts val="1100"/>
+                <a:spcPts val="1000"/>
               </a:spcAft>
               <a:buSzPct val="100000"/>
               <a:buChar char="•"/>
             </a:pPr>
             <a:r>
-              <a:rPr lang="en-US" sz="1900" dirty="0">
+              <a:rPr lang="en-US" sz="1700" dirty="0">
                 <a:solidFill>
                   <a:srgbClr val="1A1A2E"/>
                 </a:solidFill>
@@ -7781,9 +8041,9 @@
                 <a:ea typeface="Arial" pitchFamily="34" charset="-122"/>
                 <a:cs typeface="Arial" pitchFamily="34" charset="-120"/>
               </a:rPr>
-              <a:t>The protected test set is touched once, after selection on validation data.</a:t>
-            </a:r>
-            <a:endParaRPr lang="en-US" sz="1900" dirty="0"/>
+              <a:t>Protected-test metric: the same metric formula, re-evaluated once per selected circuit on a final held-out split, after selection is frozen on validation. That formula is RMSE for T1–T3; T4 is classification, so the pipeline-level term is "protected-test metric", never "protected-test RMSE".</a:t>
+            </a:r>
+            <a:endParaRPr lang="en-US" sz="1700" dirty="0"/>
           </a:p>
         </p:txBody>
       </p:sp>
@@ -7952,17 +8212,713 @@
         </p:blipFill>
         <p:spPr>
           <a:xfrm>
-            <a:off x="822960" y="1417320"/>
-            <a:ext cx="7406640" cy="3246120"/>
+            <a:off x="822960" y="1371600"/>
+            <a:ext cx="6675120" cy="2926080"/>
           </a:xfrm>
           <a:prstGeom prst="rect">
             <a:avLst/>
           </a:prstGeom>
         </p:spPr>
       </p:pic>
-      <p:sp>
-        <p:nvSpPr>
-          <p:cNvPr id="5" name="Text 2"/>
+      <p:graphicFrame>
+        <p:nvGraphicFramePr>
+          <p:cNvPr id="5" name="Table 0"/>
+          <p:cNvGraphicFramePr>
+            <a:graphicFrameLocks noGrp="1"/>
+          </p:cNvGraphicFramePr>
+          <p:nvPr>
+            <p:extLst>
+              <p:ext uri="{D42A27DB-BD31-4B8C-83A1-F6EECF244321}">
+                <p14:modId xmlns:p14="http://schemas.microsoft.com/office/powerpoint/2010/main" val="1579011935"/>
+              </p:ext>
+            </p:extLst>
+          </p:nvPr>
+        </p:nvGraphicFramePr>
+        <p:xfrm>
+          <a:off x="822960" y="4498848"/>
+          <a:ext cx="6766560" cy="914400"/>
+        </p:xfrm>
+        <a:graphic>
+          <a:graphicData uri="http://schemas.openxmlformats.org/drawingml/2006/table">
+            <a:tbl>
+              <a:tblPr/>
+              <a:tblGrid>
+                <a:gridCol w="1783080"/>
+                <a:gridCol w="4983480"/>
+              </a:tblGrid>
+              <a:tr h="292608">
+                <a:tc>
+                  <a:txBody>
+                    <a:bodyPr/>
+                    <a:lstStyle/>
+                    <a:p>
+                      <a:pPr indent="0" marL="0">
+                        <a:buNone/>
+                      </a:pPr>
+                      <a:r>
+                        <a:rPr lang="en-US" sz="1150" b="1" dirty="0">
+                          <a:solidFill>
+                            <a:srgbClr val="FFFFFF"/>
+                          </a:solidFill>
+                          <a:latin typeface="Arial" pitchFamily="34" charset="0"/>
+                          <a:ea typeface="Arial" pitchFamily="34" charset="-122"/>
+                          <a:cs typeface="Arial" pitchFamily="34" charset="-120"/>
+                        </a:rPr>
+                        <a:t>Search-space constraint</a:t>
+                      </a:r>
+                      <a:endParaRPr lang="en-US" sz="1150" dirty="0">
+                        <a:latin typeface="Arial" charset="0"/>
+                        <a:ea typeface="Arial" charset="0"/>
+                        <a:cs typeface="Arial" charset="0"/>
+                      </a:endParaRPr>
+                    </a:p>
+                  </a:txBody>
+                  <a:tcPr marL="45720" marR="45720" marT="45720" marB="45720" anchor="ctr">
+                    <a:lnL w="9525" cap="flat" cmpd="sng" algn="ctr">
+                      <a:solidFill>
+                        <a:srgbClr val="D5DAE3"/>
+                      </a:solidFill>
+                      <a:prstDash val="solid"/>
+                      <a:round/>
+                      <a:headEnd type="none" w="med" len="med"/>
+                      <a:tailEnd type="none" w="med" len="med"/>
+                    </a:lnL>
+                    <a:lnR w="9525" cap="flat" cmpd="sng" algn="ctr">
+                      <a:solidFill>
+                        <a:srgbClr val="D5DAE3"/>
+                      </a:solidFill>
+                      <a:prstDash val="solid"/>
+                      <a:round/>
+                      <a:headEnd type="none" w="med" len="med"/>
+                      <a:tailEnd type="none" w="med" len="med"/>
+                    </a:lnR>
+                    <a:lnT w="9525" cap="flat" cmpd="sng" algn="ctr">
+                      <a:solidFill>
+                        <a:srgbClr val="D5DAE3"/>
+                      </a:solidFill>
+                      <a:prstDash val="solid"/>
+                      <a:round/>
+                      <a:headEnd type="none" w="med" len="med"/>
+                      <a:tailEnd type="none" w="med" len="med"/>
+                    </a:lnT>
+                    <a:lnB w="9525" cap="flat" cmpd="sng" algn="ctr">
+                      <a:solidFill>
+                        <a:srgbClr val="D5DAE3"/>
+                      </a:solidFill>
+                      <a:prstDash val="solid"/>
+                      <a:round/>
+                      <a:headEnd type="none" w="med" len="med"/>
+                      <a:tailEnd type="none" w="med" len="med"/>
+                    </a:lnB>
+                    <a:solidFill>
+                      <a:srgbClr val="1E3A5F"/>
+                    </a:solidFill>
+                  </a:tcPr>
+                </a:tc>
+                <a:tc>
+                  <a:txBody>
+                    <a:bodyPr/>
+                    <a:lstStyle/>
+                    <a:p>
+                      <a:pPr indent="0" marL="0">
+                        <a:buNone/>
+                      </a:pPr>
+                      <a:r>
+                        <a:rPr lang="en-US" sz="1150" b="1" dirty="0">
+                          <a:solidFill>
+                            <a:srgbClr val="FFFFFF"/>
+                          </a:solidFill>
+                          <a:latin typeface="Arial" pitchFamily="34" charset="0"/>
+                          <a:ea typeface="Arial" pitchFamily="34" charset="-122"/>
+                          <a:cs typeface="Arial" pitchFamily="34" charset="-120"/>
+                        </a:rPr>
+                        <a:t>Value</a:t>
+                      </a:r>
+                      <a:endParaRPr lang="en-US" sz="1150" dirty="0">
+                        <a:latin typeface="Arial" charset="0"/>
+                        <a:ea typeface="Arial" charset="0"/>
+                        <a:cs typeface="Arial" charset="0"/>
+                      </a:endParaRPr>
+                    </a:p>
+                  </a:txBody>
+                  <a:tcPr marL="45720" marR="45720" marT="45720" marB="45720" anchor="ctr">
+                    <a:lnL w="9525" cap="flat" cmpd="sng" algn="ctr">
+                      <a:solidFill>
+                        <a:srgbClr val="D5DAE3"/>
+                      </a:solidFill>
+                      <a:prstDash val="solid"/>
+                      <a:round/>
+                      <a:headEnd type="none" w="med" len="med"/>
+                      <a:tailEnd type="none" w="med" len="med"/>
+                    </a:lnL>
+                    <a:lnR w="9525" cap="flat" cmpd="sng" algn="ctr">
+                      <a:solidFill>
+                        <a:srgbClr val="D5DAE3"/>
+                      </a:solidFill>
+                      <a:prstDash val="solid"/>
+                      <a:round/>
+                      <a:headEnd type="none" w="med" len="med"/>
+                      <a:tailEnd type="none" w="med" len="med"/>
+                    </a:lnR>
+                    <a:lnT w="9525" cap="flat" cmpd="sng" algn="ctr">
+                      <a:solidFill>
+                        <a:srgbClr val="D5DAE3"/>
+                      </a:solidFill>
+                      <a:prstDash val="solid"/>
+                      <a:round/>
+                      <a:headEnd type="none" w="med" len="med"/>
+                      <a:tailEnd type="none" w="med" len="med"/>
+                    </a:lnT>
+                    <a:lnB w="9525" cap="flat" cmpd="sng" algn="ctr">
+                      <a:solidFill>
+                        <a:srgbClr val="D5DAE3"/>
+                      </a:solidFill>
+                      <a:prstDash val="solid"/>
+                      <a:round/>
+                      <a:headEnd type="none" w="med" len="med"/>
+                      <a:tailEnd type="none" w="med" len="med"/>
+                    </a:lnB>
+                    <a:solidFill>
+                      <a:srgbClr val="1E3A5F"/>
+                    </a:solidFill>
+                  </a:tcPr>
+                </a:tc>
+              </a:tr>
+              <a:tr h="292608">
+                <a:tc>
+                  <a:txBody>
+                    <a:bodyPr/>
+                    <a:lstStyle/>
+                    <a:p>
+                      <a:pPr indent="0" marL="0">
+                        <a:buNone/>
+                      </a:pPr>
+                      <a:r>
+                        <a:rPr lang="en-US" sz="1150" dirty="0">
+                          <a:solidFill>
+                            <a:srgbClr val="000000"/>
+                          </a:solidFill>
+                          <a:latin typeface="Arial" pitchFamily="34" charset="0"/>
+                          <a:ea typeface="Arial" pitchFamily="34" charset="-122"/>
+                          <a:cs typeface="Arial" pitchFamily="34" charset="-120"/>
+                        </a:rPr>
+                        <a:t>Qubits n</a:t>
+                      </a:r>
+                      <a:endParaRPr lang="en-US" sz="1150" dirty="0">
+                        <a:latin typeface="Arial" charset="0"/>
+                        <a:ea typeface="Arial" charset="0"/>
+                        <a:cs typeface="Arial" charset="0"/>
+                      </a:endParaRPr>
+                    </a:p>
+                  </a:txBody>
+                  <a:tcPr marL="45720" marR="45720" marT="45720" marB="45720" anchor="ctr">
+                    <a:lnL w="9525" cap="flat" cmpd="sng" algn="ctr">
+                      <a:solidFill>
+                        <a:srgbClr val="D5DAE3"/>
+                      </a:solidFill>
+                      <a:prstDash val="solid"/>
+                      <a:round/>
+                      <a:headEnd type="none" w="med" len="med"/>
+                      <a:tailEnd type="none" w="med" len="med"/>
+                    </a:lnL>
+                    <a:lnR w="9525" cap="flat" cmpd="sng" algn="ctr">
+                      <a:solidFill>
+                        <a:srgbClr val="D5DAE3"/>
+                      </a:solidFill>
+                      <a:prstDash val="solid"/>
+                      <a:round/>
+                      <a:headEnd type="none" w="med" len="med"/>
+                      <a:tailEnd type="none" w="med" len="med"/>
+                    </a:lnR>
+                    <a:lnT w="9525" cap="flat" cmpd="sng" algn="ctr">
+                      <a:solidFill>
+                        <a:srgbClr val="D5DAE3"/>
+                      </a:solidFill>
+                      <a:prstDash val="solid"/>
+                      <a:round/>
+                      <a:headEnd type="none" w="med" len="med"/>
+                      <a:tailEnd type="none" w="med" len="med"/>
+                    </a:lnT>
+                    <a:lnB w="9525" cap="flat" cmpd="sng" algn="ctr">
+                      <a:solidFill>
+                        <a:srgbClr val="D5DAE3"/>
+                      </a:solidFill>
+                      <a:prstDash val="solid"/>
+                      <a:round/>
+                      <a:headEnd type="none" w="med" len="med"/>
+                      <a:tailEnd type="none" w="med" len="med"/>
+                    </a:lnB>
+                  </a:tcPr>
+                </a:tc>
+                <a:tc>
+                  <a:txBody>
+                    <a:bodyPr/>
+                    <a:lstStyle/>
+                    <a:p>
+                      <a:pPr indent="0" marL="0">
+                        <a:buNone/>
+                      </a:pPr>
+                      <a:r>
+                        <a:rPr lang="en-US" sz="1150" dirty="0">
+                          <a:solidFill>
+                            <a:srgbClr val="000000"/>
+                          </a:solidFill>
+                          <a:latin typeface="Arial" pitchFamily="34" charset="0"/>
+                          <a:ea typeface="Arial" pitchFamily="34" charset="-122"/>
+                          <a:cs typeface="Arial" pitchFamily="34" charset="-120"/>
+                        </a:rPr>
+                        <a:t>5 for T1–T4; T1 and T2 also at n = 3, 4, 6, 8</a:t>
+                      </a:r>
+                      <a:endParaRPr lang="en-US" sz="1150" dirty="0">
+                        <a:latin typeface="Arial" charset="0"/>
+                        <a:ea typeface="Arial" charset="0"/>
+                        <a:cs typeface="Arial" charset="0"/>
+                      </a:endParaRPr>
+                    </a:p>
+                  </a:txBody>
+                  <a:tcPr marL="45720" marR="45720" marT="45720" marB="45720" anchor="ctr">
+                    <a:lnL w="9525" cap="flat" cmpd="sng" algn="ctr">
+                      <a:solidFill>
+                        <a:srgbClr val="D5DAE3"/>
+                      </a:solidFill>
+                      <a:prstDash val="solid"/>
+                      <a:round/>
+                      <a:headEnd type="none" w="med" len="med"/>
+                      <a:tailEnd type="none" w="med" len="med"/>
+                    </a:lnL>
+                    <a:lnR w="9525" cap="flat" cmpd="sng" algn="ctr">
+                      <a:solidFill>
+                        <a:srgbClr val="D5DAE3"/>
+                      </a:solidFill>
+                      <a:prstDash val="solid"/>
+                      <a:round/>
+                      <a:headEnd type="none" w="med" len="med"/>
+                      <a:tailEnd type="none" w="med" len="med"/>
+                    </a:lnR>
+                    <a:lnT w="9525" cap="flat" cmpd="sng" algn="ctr">
+                      <a:solidFill>
+                        <a:srgbClr val="D5DAE3"/>
+                      </a:solidFill>
+                      <a:prstDash val="solid"/>
+                      <a:round/>
+                      <a:headEnd type="none" w="med" len="med"/>
+                      <a:tailEnd type="none" w="med" len="med"/>
+                    </a:lnT>
+                    <a:lnB w="9525" cap="flat" cmpd="sng" algn="ctr">
+                      <a:solidFill>
+                        <a:srgbClr val="D5DAE3"/>
+                      </a:solidFill>
+                      <a:prstDash val="solid"/>
+                      <a:round/>
+                      <a:headEnd type="none" w="med" len="med"/>
+                      <a:tailEnd type="none" w="med" len="med"/>
+                    </a:lnB>
+                  </a:tcPr>
+                </a:tc>
+              </a:tr>
+              <a:tr h="292608">
+                <a:tc>
+                  <a:txBody>
+                    <a:bodyPr/>
+                    <a:lstStyle/>
+                    <a:p>
+                      <a:pPr indent="0" marL="0">
+                        <a:buNone/>
+                      </a:pPr>
+                      <a:r>
+                        <a:rPr lang="en-US" sz="1150" dirty="0">
+                          <a:solidFill>
+                            <a:srgbClr val="000000"/>
+                          </a:solidFill>
+                          <a:latin typeface="Arial" pitchFamily="34" charset="0"/>
+                          <a:ea typeface="Arial" pitchFamily="34" charset="-122"/>
+                          <a:cs typeface="Arial" pitchFamily="34" charset="-120"/>
+                        </a:rPr>
+                        <a:t>Allowed gates</a:t>
+                      </a:r>
+                      <a:endParaRPr lang="en-US" sz="1150" dirty="0">
+                        <a:latin typeface="Arial" charset="0"/>
+                        <a:ea typeface="Arial" charset="0"/>
+                        <a:cs typeface="Arial" charset="0"/>
+                      </a:endParaRPr>
+                    </a:p>
+                  </a:txBody>
+                  <a:tcPr marL="45720" marR="45720" marT="45720" marB="45720" anchor="ctr">
+                    <a:lnL w="9525" cap="flat" cmpd="sng" algn="ctr">
+                      <a:solidFill>
+                        <a:srgbClr val="D5DAE3"/>
+                      </a:solidFill>
+                      <a:prstDash val="solid"/>
+                      <a:round/>
+                      <a:headEnd type="none" w="med" len="med"/>
+                      <a:tailEnd type="none" w="med" len="med"/>
+                    </a:lnL>
+                    <a:lnR w="9525" cap="flat" cmpd="sng" algn="ctr">
+                      <a:solidFill>
+                        <a:srgbClr val="D5DAE3"/>
+                      </a:solidFill>
+                      <a:prstDash val="solid"/>
+                      <a:round/>
+                      <a:headEnd type="none" w="med" len="med"/>
+                      <a:tailEnd type="none" w="med" len="med"/>
+                    </a:lnR>
+                    <a:lnT w="9525" cap="flat" cmpd="sng" algn="ctr">
+                      <a:solidFill>
+                        <a:srgbClr val="D5DAE3"/>
+                      </a:solidFill>
+                      <a:prstDash val="solid"/>
+                      <a:round/>
+                      <a:headEnd type="none" w="med" len="med"/>
+                      <a:tailEnd type="none" w="med" len="med"/>
+                    </a:lnT>
+                    <a:lnB w="9525" cap="flat" cmpd="sng" algn="ctr">
+                      <a:solidFill>
+                        <a:srgbClr val="D5DAE3"/>
+                      </a:solidFill>
+                      <a:prstDash val="solid"/>
+                      <a:round/>
+                      <a:headEnd type="none" w="med" len="med"/>
+                      <a:tailEnd type="none" w="med" len="med"/>
+                    </a:lnB>
+                  </a:tcPr>
+                </a:tc>
+                <a:tc>
+                  <a:txBody>
+                    <a:bodyPr/>
+                    <a:lstStyle/>
+                    <a:p>
+                      <a:pPr indent="0" marL="0">
+                        <a:buNone/>
+                      </a:pPr>
+                      <a:r>
+                        <a:rPr lang="en-US" sz="1150" dirty="0">
+                          <a:solidFill>
+                            <a:srgbClr val="000000"/>
+                          </a:solidFill>
+                          <a:latin typeface="Arial" pitchFamily="34" charset="0"/>
+                          <a:ea typeface="Arial" pitchFamily="34" charset="-122"/>
+                          <a:cs typeface="Arial" pitchFamily="34" charset="-120"/>
+                        </a:rPr>
+                        <a:t>rotations RX / RY / RZ / H · entanglers CNOT / CZ / CRX / CRY / CRZ over line, ring, star, pairs or all-to-all</a:t>
+                      </a:r>
+                      <a:endParaRPr lang="en-US" sz="1150" dirty="0">
+                        <a:latin typeface="Arial" charset="0"/>
+                        <a:ea typeface="Arial" charset="0"/>
+                        <a:cs typeface="Arial" charset="0"/>
+                      </a:endParaRPr>
+                    </a:p>
+                  </a:txBody>
+                  <a:tcPr marL="45720" marR="45720" marT="45720" marB="45720" anchor="ctr">
+                    <a:lnL w="9525" cap="flat" cmpd="sng" algn="ctr">
+                      <a:solidFill>
+                        <a:srgbClr val="D5DAE3"/>
+                      </a:solidFill>
+                      <a:prstDash val="solid"/>
+                      <a:round/>
+                      <a:headEnd type="none" w="med" len="med"/>
+                      <a:tailEnd type="none" w="med" len="med"/>
+                    </a:lnL>
+                    <a:lnR w="9525" cap="flat" cmpd="sng" algn="ctr">
+                      <a:solidFill>
+                        <a:srgbClr val="D5DAE3"/>
+                      </a:solidFill>
+                      <a:prstDash val="solid"/>
+                      <a:round/>
+                      <a:headEnd type="none" w="med" len="med"/>
+                      <a:tailEnd type="none" w="med" len="med"/>
+                    </a:lnR>
+                    <a:lnT w="9525" cap="flat" cmpd="sng" algn="ctr">
+                      <a:solidFill>
+                        <a:srgbClr val="D5DAE3"/>
+                      </a:solidFill>
+                      <a:prstDash val="solid"/>
+                      <a:round/>
+                      <a:headEnd type="none" w="med" len="med"/>
+                      <a:tailEnd type="none" w="med" len="med"/>
+                    </a:lnT>
+                    <a:lnB w="9525" cap="flat" cmpd="sng" algn="ctr">
+                      <a:solidFill>
+                        <a:srgbClr val="D5DAE3"/>
+                      </a:solidFill>
+                      <a:prstDash val="solid"/>
+                      <a:round/>
+                      <a:headEnd type="none" w="med" len="med"/>
+                      <a:tailEnd type="none" w="med" len="med"/>
+                    </a:lnB>
+                  </a:tcPr>
+                </a:tc>
+              </a:tr>
+              <a:tr h="292608">
+                <a:tc>
+                  <a:txBody>
+                    <a:bodyPr/>
+                    <a:lstStyle/>
+                    <a:p>
+                      <a:pPr indent="0" marL="0">
+                        <a:buNone/>
+                      </a:pPr>
+                      <a:r>
+                        <a:rPr lang="en-US" sz="1150" dirty="0">
+                          <a:solidFill>
+                            <a:srgbClr val="000000"/>
+                          </a:solidFill>
+                          <a:latin typeface="Arial" pitchFamily="34" charset="0"/>
+                          <a:ea typeface="Arial" pitchFamily="34" charset="-122"/>
+                          <a:cs typeface="Arial" pitchFamily="34" charset="-120"/>
+                        </a:rPr>
+                        <a:t>Max layer operations</a:t>
+                      </a:r>
+                      <a:endParaRPr lang="en-US" sz="1150" dirty="0">
+                        <a:latin typeface="Arial" charset="0"/>
+                        <a:ea typeface="Arial" charset="0"/>
+                        <a:cs typeface="Arial" charset="0"/>
+                      </a:endParaRPr>
+                    </a:p>
+                  </a:txBody>
+                  <a:tcPr marL="45720" marR="45720" marT="45720" marB="45720" anchor="ctr">
+                    <a:lnL w="9525" cap="flat" cmpd="sng" algn="ctr">
+                      <a:solidFill>
+                        <a:srgbClr val="D5DAE3"/>
+                      </a:solidFill>
+                      <a:prstDash val="solid"/>
+                      <a:round/>
+                      <a:headEnd type="none" w="med" len="med"/>
+                      <a:tailEnd type="none" w="med" len="med"/>
+                    </a:lnL>
+                    <a:lnR w="9525" cap="flat" cmpd="sng" algn="ctr">
+                      <a:solidFill>
+                        <a:srgbClr val="D5DAE3"/>
+                      </a:solidFill>
+                      <a:prstDash val="solid"/>
+                      <a:round/>
+                      <a:headEnd type="none" w="med" len="med"/>
+                      <a:tailEnd type="none" w="med" len="med"/>
+                    </a:lnR>
+                    <a:lnT w="9525" cap="flat" cmpd="sng" algn="ctr">
+                      <a:solidFill>
+                        <a:srgbClr val="D5DAE3"/>
+                      </a:solidFill>
+                      <a:prstDash val="solid"/>
+                      <a:round/>
+                      <a:headEnd type="none" w="med" len="med"/>
+                      <a:tailEnd type="none" w="med" len="med"/>
+                    </a:lnT>
+                    <a:lnB w="9525" cap="flat" cmpd="sng" algn="ctr">
+                      <a:solidFill>
+                        <a:srgbClr val="D5DAE3"/>
+                      </a:solidFill>
+                      <a:prstDash val="solid"/>
+                      <a:round/>
+                      <a:headEnd type="none" w="med" len="med"/>
+                      <a:tailEnd type="none" w="med" len="med"/>
+                    </a:lnB>
+                  </a:tcPr>
+                </a:tc>
+                <a:tc>
+                  <a:txBody>
+                    <a:bodyPr/>
+                    <a:lstStyle/>
+                    <a:p>
+                      <a:pPr indent="0" marL="0">
+                        <a:buNone/>
+                      </a:pPr>
+                      <a:r>
+                        <a:rPr lang="en-US" sz="1150" dirty="0">
+                          <a:solidFill>
+                            <a:srgbClr val="000000"/>
+                          </a:solidFill>
+                          <a:latin typeface="Arial" pitchFamily="34" charset="0"/>
+                          <a:ea typeface="Arial" pitchFamily="34" charset="-122"/>
+                          <a:cs typeface="Arial" pitchFamily="34" charset="-120"/>
+                        </a:rPr>
+                        <a:t>max_ops = min(2n, 16) — 10 at n=5, 16 at n=8</a:t>
+                      </a:r>
+                      <a:endParaRPr lang="en-US" sz="1150" dirty="0">
+                        <a:latin typeface="Arial" charset="0"/>
+                        <a:ea typeface="Arial" charset="0"/>
+                        <a:cs typeface="Arial" charset="0"/>
+                      </a:endParaRPr>
+                    </a:p>
+                  </a:txBody>
+                  <a:tcPr marL="45720" marR="45720" marT="45720" marB="45720" anchor="ctr">
+                    <a:lnL w="9525" cap="flat" cmpd="sng" algn="ctr">
+                      <a:solidFill>
+                        <a:srgbClr val="D5DAE3"/>
+                      </a:solidFill>
+                      <a:prstDash val="solid"/>
+                      <a:round/>
+                      <a:headEnd type="none" w="med" len="med"/>
+                      <a:tailEnd type="none" w="med" len="med"/>
+                    </a:lnL>
+                    <a:lnR w="9525" cap="flat" cmpd="sng" algn="ctr">
+                      <a:solidFill>
+                        <a:srgbClr val="D5DAE3"/>
+                      </a:solidFill>
+                      <a:prstDash val="solid"/>
+                      <a:round/>
+                      <a:headEnd type="none" w="med" len="med"/>
+                      <a:tailEnd type="none" w="med" len="med"/>
+                    </a:lnR>
+                    <a:lnT w="9525" cap="flat" cmpd="sng" algn="ctr">
+                      <a:solidFill>
+                        <a:srgbClr val="D5DAE3"/>
+                      </a:solidFill>
+                      <a:prstDash val="solid"/>
+                      <a:round/>
+                      <a:headEnd type="none" w="med" len="med"/>
+                      <a:tailEnd type="none" w="med" len="med"/>
+                    </a:lnT>
+                    <a:lnB w="9525" cap="flat" cmpd="sng" algn="ctr">
+                      <a:solidFill>
+                        <a:srgbClr val="D5DAE3"/>
+                      </a:solidFill>
+                      <a:prstDash val="solid"/>
+                      <a:round/>
+                      <a:headEnd type="none" w="med" len="med"/>
+                      <a:tailEnd type="none" w="med" len="med"/>
+                    </a:lnB>
+                  </a:tcPr>
+                </a:tc>
+              </a:tr>
+              <a:tr h="292608">
+                <a:tc>
+                  <a:txBody>
+                    <a:bodyPr/>
+                    <a:lstStyle/>
+                    <a:p>
+                      <a:pPr indent="0" marL="0">
+                        <a:buNone/>
+                      </a:pPr>
+                      <a:r>
+                        <a:rPr lang="en-US" sz="1150" dirty="0">
+                          <a:solidFill>
+                            <a:srgbClr val="000000"/>
+                          </a:solidFill>
+                          <a:latin typeface="Arial" pitchFamily="34" charset="0"/>
+                          <a:ea typeface="Arial" pitchFamily="34" charset="-122"/>
+                          <a:cs typeface="Arial" pitchFamily="34" charset="-120"/>
+                        </a:rPr>
+                        <a:t>Operation ≠ physical gate</a:t>
+                      </a:r>
+                      <a:endParaRPr lang="en-US" sz="1150" dirty="0">
+                        <a:latin typeface="Arial" charset="0"/>
+                        <a:ea typeface="Arial" charset="0"/>
+                        <a:cs typeface="Arial" charset="0"/>
+                      </a:endParaRPr>
+                    </a:p>
+                  </a:txBody>
+                  <a:tcPr marL="45720" marR="45720" marT="45720" marB="45720" anchor="ctr">
+                    <a:lnL w="9525" cap="flat" cmpd="sng" algn="ctr">
+                      <a:solidFill>
+                        <a:srgbClr val="D5DAE3"/>
+                      </a:solidFill>
+                      <a:prstDash val="solid"/>
+                      <a:round/>
+                      <a:headEnd type="none" w="med" len="med"/>
+                      <a:tailEnd type="none" w="med" len="med"/>
+                    </a:lnL>
+                    <a:lnR w="9525" cap="flat" cmpd="sng" algn="ctr">
+                      <a:solidFill>
+                        <a:srgbClr val="D5DAE3"/>
+                      </a:solidFill>
+                      <a:prstDash val="solid"/>
+                      <a:round/>
+                      <a:headEnd type="none" w="med" len="med"/>
+                      <a:tailEnd type="none" w="med" len="med"/>
+                    </a:lnR>
+                    <a:lnT w="9525" cap="flat" cmpd="sng" algn="ctr">
+                      <a:solidFill>
+                        <a:srgbClr val="D5DAE3"/>
+                      </a:solidFill>
+                      <a:prstDash val="solid"/>
+                      <a:round/>
+                      <a:headEnd type="none" w="med" len="med"/>
+                      <a:tailEnd type="none" w="med" len="med"/>
+                    </a:lnT>
+                    <a:lnB w="9525" cap="flat" cmpd="sng" algn="ctr">
+                      <a:solidFill>
+                        <a:srgbClr val="D5DAE3"/>
+                      </a:solidFill>
+                      <a:prstDash val="solid"/>
+                      <a:round/>
+                      <a:headEnd type="none" w="med" len="med"/>
+                      <a:tailEnd type="none" w="med" len="med"/>
+                    </a:lnB>
+                  </a:tcPr>
+                </a:tc>
+                <a:tc>
+                  <a:txBody>
+                    <a:bodyPr/>
+                    <a:lstStyle/>
+                    <a:p>
+                      <a:pPr indent="0" marL="0">
+                        <a:buNone/>
+                      </a:pPr>
+                      <a:r>
+                        <a:rPr lang="en-US" sz="1150" dirty="0">
+                          <a:solidFill>
+                            <a:srgbClr val="000000"/>
+                          </a:solidFill>
+                          <a:latin typeface="Arial" pitchFamily="34" charset="0"/>
+                          <a:ea typeface="Arial" pitchFamily="34" charset="-122"/>
+                          <a:cs typeface="Arial" pitchFamily="34" charset="-120"/>
+                        </a:rPr>
+                        <a:t>one operation expands to many physical gates: a rotation layer becomes n single-qubit gates, an entangling layer up to n two-qubit gates</a:t>
+                      </a:r>
+                      <a:endParaRPr lang="en-US" sz="1150" dirty="0">
+                        <a:latin typeface="Arial" charset="0"/>
+                        <a:ea typeface="Arial" charset="0"/>
+                        <a:cs typeface="Arial" charset="0"/>
+                      </a:endParaRPr>
+                    </a:p>
+                  </a:txBody>
+                  <a:tcPr marL="45720" marR="45720" marT="45720" marB="45720" anchor="ctr">
+                    <a:lnL w="9525" cap="flat" cmpd="sng" algn="ctr">
+                      <a:solidFill>
+                        <a:srgbClr val="D5DAE3"/>
+                      </a:solidFill>
+                      <a:prstDash val="solid"/>
+                      <a:round/>
+                      <a:headEnd type="none" w="med" len="med"/>
+                      <a:tailEnd type="none" w="med" len="med"/>
+                    </a:lnL>
+                    <a:lnR w="9525" cap="flat" cmpd="sng" algn="ctr">
+                      <a:solidFill>
+                        <a:srgbClr val="D5DAE3"/>
+                      </a:solidFill>
+                      <a:prstDash val="solid"/>
+                      <a:round/>
+                      <a:headEnd type="none" w="med" len="med"/>
+                      <a:tailEnd type="none" w="med" len="med"/>
+                    </a:lnR>
+                    <a:lnT w="9525" cap="flat" cmpd="sng" algn="ctr">
+                      <a:solidFill>
+                        <a:srgbClr val="D5DAE3"/>
+                      </a:solidFill>
+                      <a:prstDash val="solid"/>
+                      <a:round/>
+                      <a:headEnd type="none" w="med" len="med"/>
+                      <a:tailEnd type="none" w="med" len="med"/>
+                    </a:lnT>
+                    <a:lnB w="9525" cap="flat" cmpd="sng" algn="ctr">
+                      <a:solidFill>
+                        <a:srgbClr val="D5DAE3"/>
+                      </a:solidFill>
+                      <a:prstDash val="solid"/>
+                      <a:round/>
+                      <a:headEnd type="none" w="med" len="med"/>
+                      <a:tailEnd type="none" w="med" len="med"/>
+                    </a:lnB>
+                  </a:tcPr>
+                </a:tc>
+              </a:tr>
+            </a:tbl>
+          </a:graphicData>
+        </a:graphic>
+      </p:graphicFrame>
+      <p:sp>
+        <p:nvSpPr>
+          <p:cNvPr id="6" name="Text 2"/>
           <p:cNvSpPr/>
           <p:nvPr/>
         </p:nvSpPr>
@@ -8016,7 +8972,7 @@
       </p:sp>
       <p:sp>
         <p:nvSpPr>
-          <p:cNvPr id="6" name="Text 3"/>
+          <p:cNvPr id="7" name="Text 3"/>
           <p:cNvSpPr/>
           <p:nvPr/>
         </p:nvSpPr>
@@ -8070,7 +9026,7 @@
       </p:sp>
       <p:sp>
         <p:nvSpPr>
-          <p:cNvPr id="7" name="Text 4"/>
+          <p:cNvPr id="8" name="Text 4"/>
           <p:cNvSpPr/>
           <p:nvPr/>
         </p:nvSpPr>
@@ -8124,7 +9080,7 @@
       </p:sp>
       <p:sp>
         <p:nvSpPr>
-          <p:cNvPr id="8" name="Text 5"/>
+          <p:cNvPr id="9" name="Text 5"/>
           <p:cNvSpPr/>
           <p:nvPr/>
         </p:nvSpPr>
@@ -8178,7 +9134,7 @@
       </p:sp>
       <p:sp>
         <p:nvSpPr>
-          <p:cNvPr id="9" name="Text 6"/>
+          <p:cNvPr id="10" name="Text 6"/>
           <p:cNvSpPr/>
           <p:nvPr/>
         </p:nvSpPr>
@@ -8209,7 +9165,7 @@
                 <a:ea typeface="Arial" pitchFamily="34" charset="-122"/>
                 <a:cs typeface="Arial" pitchFamily="34" charset="-120"/>
               </a:rPr>
-              <a:t>Generator: llm_vqc/tasks/signal_suite (frozen signal_suite_v1) · data seed 1000</a:t>
+              <a:t>Line colour distinguishes the three example signals in a panel only — it encodes no method, arm or class · Generator: llm_vqc/tasks/signal_suite (signal_suite_v1) · data seed 1000</a:t>
             </a:r>
             <a:endParaRPr lang="en-US" sz="1100" dirty="0"/>
           </a:p>
@@ -8878,7 +9834,7 @@
                 <a:ea typeface="Arial" pitchFamily="34" charset="-122"/>
                 <a:cs typeface="Arial" pitchFamily="34" charset="-120"/>
               </a:rPr>
-              <a:t>Classical half finished; the LLM half has not started</a:t>
+              <a:t>Classical matrix complete; real-LLM matrix not started</a:t>
             </a:r>
             <a:endParaRPr lang="en-US" sz="3000" dirty="0"/>
           </a:p>
@@ -8974,7 +9930,7 @@
               <a:buNone/>
             </a:pPr>
             <a:r>
-              <a:rPr lang="en-US" sz="1900" dirty="0">
+              <a:rPr lang="en-US" sz="1700" dirty="0">
                 <a:solidFill>
                   <a:srgbClr val="1A1A2E"/>
                 </a:solidFill>
@@ -8982,13 +9938,13 @@
                 <a:ea typeface="Arial" pitchFamily="34" charset="-122"/>
                 <a:cs typeface="Arial" pitchFamily="34" charset="-120"/>
               </a:rPr>
-              <a:t>   ·   0 / 220 real-LLM cells   ·   E4 and E5 depend on them   ·   </a:t>
+              <a:t>   ·   0 / 220 real-LLM cells — the API account returned insufficient_quota, so $0.00 was spent   ·   </a:t>
             </a:r>
             <a:pPr indent="0" marL="0">
               <a:buNone/>
             </a:pPr>
             <a:r>
-              <a:rPr lang="en-US" sz="1900" b="1" dirty="0">
+              <a:rPr lang="en-US" sz="1800" b="1" dirty="0">
                 <a:solidFill>
                   <a:srgbClr val="B3261E"/>
                 </a:solidFill>
@@ -9035,7 +9991,7 @@
                 <a:ea typeface="Arial" pitchFamily="34" charset="-122"/>
                 <a:cs typeface="Arial" pitchFamily="34" charset="-120"/>
               </a:rPr>
-              <a:t>Counts regenerated from runs/bench_v2/*/cells/*.json · completion checker: 9 of 17 criteria pass</a:t>
+              <a:t>Counts regenerated from runs/bench_v2/*/cells/*.json · completion checker: 10 of 17 criteria pass, unweakened</a:t>
             </a:r>
             <a:endParaRPr lang="en-US" sz="1100" dirty="0"/>
           </a:p>
@@ -9121,7 +10077,7 @@
         <p:spPr>
           <a:xfrm>
             <a:off x="502920" y="548640"/>
-            <a:ext cx="11185855" cy="658368"/>
+            <a:ext cx="11185855" cy="804672"/>
           </a:xfrm>
           <a:prstGeom prst="rect">
             <a:avLst/>
@@ -9137,7 +10093,7 @@
               <a:buNone/>
             </a:pPr>
             <a:r>
-              <a:rPr lang="en-US" sz="3000" b="1" dirty="0">
+              <a:rPr lang="en-US" sz="2300" b="1" dirty="0">
                 <a:solidFill>
                   <a:srgbClr val="1E3A5F"/>
                 </a:solidFill>
@@ -9145,9 +10101,9 @@
                 <a:ea typeface="Arial" pitchFamily="34" charset="-122"/>
                 <a:cs typeface="Arial" pitchFamily="34" charset="-120"/>
               </a:rPr>
-              <a:t>Searching helps; which search you use does not</a:t>
-            </a:r>
-            <a:endParaRPr lang="en-US" sz="3000" dirty="0"/>
+              <a:t>Search beats the fixed reference on T1/T2; no search-method difference was detected</a:t>
+            </a:r>
+            <a:endParaRPr lang="en-US" sz="2300" dirty="0"/>
           </a:p>
         </p:txBody>
       </p:sp>
@@ -9167,8 +10123,8 @@
         </p:blipFill>
         <p:spPr>
           <a:xfrm>
-            <a:off x="457200" y="1371600"/>
-            <a:ext cx="6858000" cy="3840480"/>
+            <a:off x="411480" y="1444752"/>
+            <a:ext cx="7223760" cy="4041648"/>
           </a:xfrm>
           <a:prstGeom prst="rect">
             <a:avLst/>
@@ -9191,8 +10147,8 @@
         </p:blipFill>
         <p:spPr>
           <a:xfrm>
-            <a:off x="7452360" y="1371600"/>
-            <a:ext cx="4343400" cy="2724912"/>
+            <a:off x="7589520" y="1444752"/>
+            <a:ext cx="4096512" cy="2770632"/>
           </a:xfrm>
           <a:prstGeom prst="rect">
             <a:avLst/>
@@ -9207,8 +10163,8 @@
         </p:nvSpPr>
         <p:spPr>
           <a:xfrm>
-            <a:off x="7452360" y="4297680"/>
-            <a:ext cx="4389120" cy="1737360"/>
+            <a:off x="7589520" y="4389120"/>
+            <a:ext cx="4096512" cy="1783080"/>
           </a:xfrm>
           <a:prstGeom prst="rect">
             <a:avLst/>
@@ -9228,7 +10184,7 @@
               <a:buChar char="•"/>
             </a:pPr>
             <a:r>
-              <a:rPr lang="en-US" sz="1600" dirty="0">
+              <a:rPr lang="en-US" sz="1500" dirty="0">
                 <a:solidFill>
                   <a:srgbClr val="1A1A2E"/>
                 </a:solidFill>
@@ -9238,7 +10194,7 @@
               </a:rPr>
               <a:t>No Holm-adjusted difference was detected among random, evolutionary and greedy on any task (smallest p = 0.071). This is not an equivalence claim.</a:t>
             </a:r>
-            <a:endParaRPr lang="en-US" sz="1600" dirty="0"/>
+            <a:endParaRPr lang="en-US" sz="1500" dirty="0"/>
           </a:p>
           <a:p>
             <a:pPr marL="342900" indent="-342900">
@@ -9249,7 +10205,7 @@
               <a:buChar char="•"/>
             </a:pPr>
             <a:r>
-              <a:rPr lang="en-US" sz="1600" dirty="0">
+              <a:rPr lang="en-US" sz="1500" dirty="0">
                 <a:solidFill>
                   <a:srgbClr val="1A1A2E"/>
                 </a:solidFill>
@@ -9259,7 +10215,7 @@
               </a:rPr>
               <a:t>Against the strongest reference the picture is task-dependent: on T2 random and evolutionary win (p = 0.046, δ = −0.8); on T1 only random is detected (p = 0.032) and the shift is small.</a:t>
             </a:r>
-            <a:endParaRPr lang="en-US" sz="1600" dirty="0"/>
+            <a:endParaRPr lang="en-US" sz="1500" dirty="0"/>
           </a:p>
         </p:txBody>
       </p:sp>
@@ -9382,7 +10338,7 @@
         <p:spPr>
           <a:xfrm>
             <a:off x="502920" y="548640"/>
-            <a:ext cx="11185855" cy="658368"/>
+            <a:ext cx="11185855" cy="804672"/>
           </a:xfrm>
           <a:prstGeom prst="rect">
             <a:avLst/>
@@ -9398,7 +10354,7 @@
               <a:buNone/>
             </a:pPr>
             <a:r>
-              <a:rPr lang="en-US" sz="3000" b="1" dirty="0">
+              <a:rPr lang="en-US" sz="2300" b="1" dirty="0">
                 <a:solidFill>
                   <a:srgbClr val="1E3A5F"/>
                 </a:solidFill>
@@ -9406,9 +10362,9 @@
                 <a:ea typeface="Arial" pitchFamily="34" charset="-122"/>
                 <a:cs typeface="Arial" pitchFamily="34" charset="-120"/>
               </a:rPr>
-              <a:t>The advantage over a fixed ansatz grows with qubit count</a:t>
-            </a:r>
-            <a:endParaRPr lang="en-US" sz="3000" dirty="0"/>
+              <a:t>A descriptive crossover: search pulls ahead at larger qubit counts</a:t>
+            </a:r>
+            <a:endParaRPr lang="en-US" sz="2300" dirty="0"/>
           </a:p>
         </p:txBody>
       </p:sp>
@@ -9635,7 +10591,7 @@
         <p:spPr>
           <a:xfrm>
             <a:off x="502920" y="548640"/>
-            <a:ext cx="11185855" cy="658368"/>
+            <a:ext cx="11185855" cy="804672"/>
           </a:xfrm>
           <a:prstGeom prst="rect">
             <a:avLst/>
@@ -9651,7 +10607,7 @@
               <a:buNone/>
             </a:pPr>
             <a:r>
-              <a:rPr lang="en-US" sz="3000" b="1" dirty="0">
+              <a:rPr lang="en-US" sz="2300" b="1" dirty="0">
                 <a:solidFill>
                   <a:srgbClr val="1E3A5F"/>
                 </a:solidFill>
@@ -9661,7 +10617,7 @@
               </a:rPr>
               <a:t>Lower error comes with substantially larger compiled circuits</a:t>
             </a:r>
-            <a:endParaRPr lang="en-US" sz="3000" dirty="0"/>
+            <a:endParaRPr lang="en-US" sz="2300" dirty="0"/>
           </a:p>
         </p:txBody>
       </p:sp>

--- a/docs/presentation/bench_v2_weekly_revised/20260731_GSoC_revised.pptx
+++ b/docs/presentation/bench_v2_weekly_revised/20260731_GSoC_revised.pptx
@@ -519,7 +519,7 @@
           <a:p>
             <a:r>
               <a:rPr lang="en-US" dirty="0"/>
-              <a:t>Short framing: this is an interim update. The classical half of the benchmark is finished, the LLM half has not run yet because it needs API spending approval. VQC = variational quantum circuit; QAS = quantum architecture search. Everything shown is generated from durable stores at commit 589b7e3.</a:t>
+              <a:t>Short framing: this is an interim update. The classical half of the benchmark is finished, the LLM half has not run: the API account returned insufficient_quota, so nothing was spent. VQC = variational quantum circuit; QAS = quantum architecture search. Everything shown is generated from durable stores at commit f159d35.</a:t>
             </a:r>
             <a:endParaRPr lang="en-US" dirty="0"/>
           </a:p>
@@ -1751,7 +1751,7 @@
           <a:p>
             <a:r>
               <a:rPr lang="en-US" dirty="0"/>
-              <a:t>E0 replays the February pilot offline and reproduces it exactly with zero API calls. E1 is the joint track, E2 the main n=5 architecture search, E3 the qubit-scaling study. All 460 classical cells finished with no failures. The 220 LLM cells are blocked by spending policy, and E4 and E5 depend on them, so they are pending too. The completion checker reports 10 of 17 criteria — it fails correctly and I did not weaken it.</a:t>
+              <a:t>E0 replays the February pilot offline and reproduces it exactly with zero API calls. E1 is the joint track, E2 the main n=5 architecture search, E3 the qubit-scaling study. All 460 classical cells finished with no failures. The 220 LLM cells never started because the API account has no quota — not because the cap refused them; measured spend is zero. and E4 and E5 depend on them, so they are pending too. The completion checker reports 10 of 17 criteria — it fails correctly and I did not weaken it.</a:t>
             </a:r>
             <a:endParaRPr lang="en-US" dirty="0"/>
           </a:p>
@@ -2615,7 +2615,7 @@
                 <a:ea typeface="Arial" pitchFamily="34" charset="-122"/>
                 <a:cs typeface="Arial" pitchFamily="34" charset="-120"/>
               </a:rPr>
-              <a:t>July 31, 2026  ·  base commit 589b7e3  ·  experiment/bench-v2-real-llm-cost-minimal</a:t>
+              <a:t>July 31, 2026  ·  base commit f159d35  ·  experiment/bench-v2-real-llm-cost-minimal</a:t>
             </a:r>
             <a:endParaRPr lang="en-US" sz="2000" dirty="0"/>
           </a:p>
